--- a/Progression_P5/P5-L12_Review_and_Unit_Assessment_Social_Issues.pptx
+++ b/Progression_P5/P5-L12_Review_and_Unit_Assessment_Social_Issues.pptx
@@ -626,7 +626,11 @@
           <a:lstStyle/>
           <a:p>
             <a:r>
-              <a:rPr lang="en-US" dirty="0"/>
+              <a:rPr lang="ar-SA" dirty="0">
+                <a:latin typeface="Amiri" pitchFamily="2" charset="-78"/>
+                <a:ea typeface="Amiri" pitchFamily="2" charset="-78"/>
+                <a:cs typeface="Amiri" pitchFamily="2" charset="-78"/>
+              </a:rPr>
               <a:t>LISTENING TEXT 1 · QUESTIONS 5–8 (website Part A, 20 marks). Before listening: label each question with the signal you expect (أُطْرُوحَتِي · صَحِيحٌ أَنَّ · غَيْرَ أَنَّ · يَتَطَلَّبُ / يَمْنَعُ / يَرْفُضُ أَنْ · سَـ / لَـ · كَانَ قَدْ) — P5-L10: follow the shape, and remember the point after صَحِيحٌ أَنَّ belongs to the OTHER side. Question 5: the sa- result = a real recommendation. Question 6: the la- result = it did NOT happen. Question 7: yataṭallabu an = the demand. Question 8: a concession + refutation = balanced. Each recording may be played twice; students answer after the second reading.
 SCRIPT: يَقُولُ الأَكَادِيمِيُّ: أُطْرُوحَتِي أَنَّ التَّفَاوُتَ الاجْتِمَاعِيَّ يُهَدِّدُ الاسْتِقْرَارَ فِي العَالَمِ العَرَبِيِّ. أَكَّدَتِ الدِّرَاسَاتُ أَنَّ أَكْثَرَ مِنْ مِئَةِ مِلْيُونِ عَرَبِيٍّ يَعِيشُونَ تَحْتَ حَدِّ الفَقْرِ. صَحِيحٌ أَنَّ الإِصْلَاحَاتِ تَحْتَاجُ وَقْتًا طَوِيلًا وَمَوَارِدَ ضَخْمَةً، غَيْرَ أَنَّ الحَاجَةَ الاجْتِمَاعِيَّةَ المُلِحَّةَ لَا تَتَحَمَّلُ الانْتِظَارَ. إِذَا اسْتُثْمِرَ فِي التَّعْلِيمِ المُبَكِّرِ، سَتَضِيقُ الفَجْوَةُ تَدْرِيجِيًّا. وَلَوْ عُولِجَ التَّفَاوُتُ قَبْلَ عُقُودٍ، لَتَحَسَّنَ الوَضْعُ كَثِيرًا. وَيَتَطَلَّبُ الوَضْعُ أَنْ تَتَحَرَّكَ الحُكُومَاتُ فَوْرًا. وَبِنَاءً عَلَى مَا سَبَقَ، فَمَوْقِفِي وَاضِحٌ: العَدَالَةُ الاجْتِمَاعِيَّةُ ضَرُورَةٌ لَا رَفَاهِيَةٌ.
 Private chat: 4 letters.</a:t>
@@ -804,7 +808,11 @@
           <a:lstStyle/>
           <a:p>
             <a:r>
-              <a:rPr lang="en-US" dirty="0"/>
+              <a:rPr lang="ar-SA" dirty="0">
+                <a:latin typeface="Amiri" pitchFamily="2" charset="-78"/>
+                <a:ea typeface="Amiri" pitchFamily="2" charset="-78"/>
+                <a:cs typeface="Amiri" pitchFamily="2" charset="-78"/>
+              </a:rPr>
               <a:t>LISTENING TEXT 2 · 6 QUESTIONS (website Part A, 20 marks). Before listening: label each question with the signal you expect (أُطْرُوحَتِي · صَحِيحٌ أَنَّ · غَيْرَ أَنَّ · يَتَطَلَّبُ / يَمْنَعُ / يَرْفُضُ أَنْ · سَـ / لَـ · كَانَ قَدْ) — P5-L10: follow the shape, and remember the point after صَحِيحٌ أَنَّ belongs to the OTHER side. Attribution: write K / H / both beside each question while listening — listen for the name before each line, then the signal (yamnaʿu · arfuḍu an · ṣaḥīḥun anna · law … la-). Each recording may be played twice; students answer after the second reading.
 SCRIPT: مُتَحَدِّثٌ أَوَّلُ (كَرِيمٌ): يَجِبُ أَنْ تُنَظِّمَ الدُّوَلُ الإِنْتِرْنِتَ لِحِمَايَةِ المُوَاطِنِينَ. مُتَحَدِّثَةٌ ثَانِيَةٌ (هُدَى): صَحِيحٌ أَنَّ التَّنْظِيمَ ضَرُورِيٌّ، غَيْرَ أَنَّهُ يَجِبُ أَلَّا يُقَيِّدَ حُرِّيَّةَ التَّعْبِيرِ. كَرِيمٌ: يَمْنَعُ القَانُونُ أَنْ تُبَاعَ البَيَانَاتُ الشَّخْصِيَّةُ، وَهٰذَا حَقٌّ. هُدَى: وَأَنَا أَرْفُضُ أَنْ تُرَاقَبَ المُرَاسَلَاتُ الخَاصَّةُ دُونَ إِذْنٍ. كَرِيمٌ: لَوْ وُضِعَتْ حَوْكَمَةٌ رَقْمِيَّةٌ مُتَوَازِنَةٌ، لَكَانَتِ الخُصُوصِيَّةُ أَكْثَرَ أَمَانًا. هُدَى: وَبِنَاءً عَلَى مَا سَبَقَ، لَا بُدَّ مِنَ التَّوَازُنِ بَيْنَ الأَمْنِ وَالحُرِّيَّةِ.
 Private chat: 6 letters.</a:t>
@@ -982,7 +990,11 @@
           <a:lstStyle/>
           <a:p>
             <a:r>
-              <a:rPr lang="en-US" dirty="0"/>
+              <a:rPr lang="ar-SA" dirty="0">
+                <a:latin typeface="Amiri" pitchFamily="2" charset="-78"/>
+                <a:ea typeface="Amiri" pitchFamily="2" charset="-78"/>
+                <a:cs typeface="Amiri" pitchFamily="2" charset="-78"/>
+              </a:rPr>
               <a:t>LISTENING TEXT 3 · 6 QUESTIONS (website Part A, 20 marks). Before listening: label each question with the signal you expect (أُطْرُوحَتِي · صَحِيحٌ أَنَّ · غَيْرَ أَنَّ · يَتَطَلَّبُ / يَمْنَعُ / يَرْفُضُ أَنْ · سَـ / لَـ · كَانَ قَدْ) — P5-L10: follow the shape, and remember the point after صَحِيحٌ أَنَّ belongs to the OTHER side. Each question names the structure it tests: listen for kānat qad, yuʿīdu taʿrīfa, ṣaḥīḥun anna … ghayra anna, nuṭālibu bi-an / nuṣirru ʿalā an, law … la- and wa-bināʾan ʿalā mā sabaqa. Each recording may be played twice; students answer after the second reading.
 SCRIPT: تَقُولُ النَّاشِطَةُ الشَّابَّةُ: يُشَكِّلُ الشَّبَابُ أَكْثَرَ مِنْ نِصْفِ سُكَّانِ العَالَمِ العَرَبِيِّ. كَانَتِ الأَجْيَالُ السَّابِقَةُ قَدْ نَاضَلَتْ مِنْ أَجْلِ الاسْتِقْلَالِ، أَمَّا جِيلُنَا فَيُعِيدُ تَعْرِيفَ المُشَارَكَةِ عَبْرَ الوَسَائِطِ الرَّقْمِيَّةِ. صَحِيحٌ أَنَّ التَّحَدِّيَاتِ كَبِيرَةٌ، غَيْرَ أَنَّ الطَّاقَاتِ أَكْبَرُ. نَحْنُ نُطَالِبُ بِأَنْ تُفْتَحَ أَبْوَابُ المُشَارَكَةِ، وَنُصِرُّ عَلَى أَنْ نَكُونَ شُرَكَاءَ فِي القَرَارِ. وَلَوْ أُتِيحَتْ لَنَا الفُرَصُ، لَغَيَّرْنَا وَاقِعَنَا. وَبِنَاءً عَلَى مَا سَبَقَ، لَا تَنْمِيَةَ حَقِيقِيَّةً دُونَ تَمْكِينِ الشَّبَابِ.
 Private chat: 6 letters.</a:t>
@@ -1512,7 +1524,11 @@
           <a:lstStyle/>
           <a:p>
             <a:r>
-              <a:rPr lang="en-US" dirty="0"/>
+              <a:rPr lang="ar-SA" dirty="0">
+                <a:latin typeface="Amiri" pitchFamily="2" charset="-78"/>
+                <a:ea typeface="Amiri" pitchFamily="2" charset="-78"/>
+                <a:cs typeface="Amiri" pitchFamily="2" charset="-78"/>
+              </a:rPr>
               <a:t>WELCOME (1 min) — while students join.
 • Greet each student by name as they arrive: السَّلَامُ عَلَيْكُمْ. Take the register (Pastoral Tracker: attendance 0/1).
 • 2-MINUTE CHECK-IN (SEND training): a private chat to any student who seemed unsettled last lesson — “Are you okay today? 👍 / 👎”.
@@ -1693,7 +1709,11 @@
           <a:lstStyle/>
           <a:p>
             <a:r>
-              <a:rPr lang="en-US" dirty="0"/>
+              <a:rPr lang="ar-SA" dirty="0">
+                <a:latin typeface="Amiri" pitchFamily="2" charset="-78"/>
+                <a:ea typeface="Amiri" pitchFamily="2" charset="-78"/>
+                <a:cs typeface="Amiri" pitchFamily="2" charset="-78"/>
+              </a:rPr>
               <a:t>WRITING QUESTION 1 (website, 5 marks): one mark per field completed accurately in Arabic (a phrase is enough). Field 2 must use reported speech (أَكَّدَ … أَنَّ + noun); field 3 صَحِيحٌ أَنَّ + a verb in -u; field 4 غَيْرَ أَنَّ; field 5 وَبِنَاءً عَلَى مَا سَبَقَ + a verb in -a. Check anna vs an.</a:t>
             </a:r>
             <a:endParaRPr lang="en-US" dirty="0"/>
@@ -1869,7 +1889,11 @@
           <a:lstStyle/>
           <a:p>
             <a:r>
-              <a:rPr lang="en-US" dirty="0"/>
+              <a:rPr lang="ar-SA" dirty="0">
+                <a:latin typeface="Amiri" pitchFamily="2" charset="-78"/>
+                <a:ea typeface="Amiri" pitchFamily="2" charset="-78"/>
+                <a:cs typeface="Amiri" pitchFamily="2" charset="-78"/>
+              </a:rPr>
               <a:t>ROLE PLAY (website, 4 marks). Teacher plays the chair of a social-justice conference: أَهْلًا بِكَ فِي مُؤْتَمَرِ العَدَالَةِ الاجْتِمَاعِيَّةِ. مَا القَضِيَّةُ الَّتِي تُعَالِجُهَا؟ Model answers: أُعَالِجُ قَضِيَّةَ الفَجْوَةِ الرَّقْمِيَّةِ؛ فَقَدْ أَكَّدَتِ الدِّرَاسَاتُ أَنَّ مَلَايِينَ الشَّبَابِ بِلَا إِنْتِرْنِتٍ · صَحِيحٌ أَنَّ الحُكُومَاتِ تَبْذُلُ جُهُودًا · غَيْرَ أَنَّ هٰذِهِ الجُهُودَ لَا تَصِلُ إِلَى المَنَاطِقِ النَّائِيَةِ · يَتَطَلَّبُ الحَلُّ أَنْ نُوَفِّرَ بُنْيَةً تَحْتِيَّةً رَقْمِيَّةً لِلْجَمِيعِ. Website mark scheme: Communication (2): all four prompts are addressed clearly and relevantly. Accuracy (2): a genuine concession (ṣaḥīḥun anna) in prompt 2 and a refutation (ghayra anna) in prompt 3. The issue is introduced with evidence and reported speech. To a girl: قَدِّمِي · قُولِي · اعْرِضِي · اذْكُرِي.</a:t>
             </a:r>
             <a:endParaRPr lang="en-US" dirty="0"/>
@@ -1957,7 +1981,11 @@
           <a:lstStyle/>
           <a:p>
             <a:r>
-              <a:rPr lang="en-US" dirty="0"/>
+              <a:rPr lang="ar-SA" dirty="0">
+                <a:latin typeface="Amiri" pitchFamily="2" charset="-78"/>
+                <a:ea typeface="Amiri" pitchFamily="2" charset="-78"/>
+                <a:cs typeface="Amiri" pitchFamily="2" charset="-78"/>
+              </a:rPr>
               <a:t>TOPIC CONVERSATION (website, 6 marks): structure · reason · example (P5-L11). Model openings: يُشَكِّلُ التَّفَاوُتُ الاجْتِمَاعِيُّ أَكْبَرَ تَحَدٍّ، إِذْ أَكَّدَتِ الدِّرَاسَاتُ أَنَّ … · صَحِيحٌ أَنَّ التِّكْنُولُوجِيَا تُوَفِّرُ فُرَصًا، غَيْرَ أَنَّهَا تُعَمِّقُ الفَجْوَةَ … · لَوْ كُنْتُ فِي مَوْقِعِ السُّلْطَةِ، لَاسْتَثْمَرْتُ فِي التَّعْلِيمِ المُبَكِّرِ أَوَّلًا. Website mark scheme: Communication (3): answers are developed with point, reason and example. Quality of language (3): a full argument (Q1), a concession-refutation (Q2) and a Type 2 conditional (Q3) all appear. Q3 opens with law (Type 2 required); a candidate who answers with idhā is avoiding the conditional. Credit spontaneous ṣaḥīḥun anna / ghayra anna in Q2. Allow time-buying and repair phrases (سُؤَالٌ مُهِمٌّ · دَعْنِي أُفَكِّرُ · عَفْوًا، أَقْصِدُ). To a girl: تَعْتَقِدِينَ · كُنْتِ · سَتُغَيِّرِينَ. ORGANISATION: one-to-one while others finish writing, or trusted pairs with the teacher as examiner.</a:t>
             </a:r>
             <a:endParaRPr lang="en-US" dirty="0"/>
@@ -2671,7 +2699,11 @@
           <a:lstStyle/>
           <a:p>
             <a:r>
-              <a:rPr lang="en-US" dirty="0"/>
+              <a:rPr lang="ar-SA" dirty="0">
+                <a:latin typeface="Amiri" pitchFamily="2" charset="-78"/>
+                <a:ea typeface="Amiri" pitchFamily="2" charset="-78"/>
+                <a:cs typeface="Amiri" pitchFamily="2" charset="-78"/>
+              </a:rPr>
               <a:t>REVIEW (website twelve-question grammar spine, correct answers): صَحِيحٌ أَنَّ … يَتَطَلَّبُ · غَيْرَ أَنَّ · يُصِرُّ … عَلَى أَنْ تَحْصُلَ · يُطَالِبُ … بِأَنْ تُوَقِّعَ · يَمْنَعُ … أَنْ تُبَاعَ · يَرْفُضُ … أَنْ تَسْتَمِرَّ · وَبِنَاءً عَلَى مَا سَبَقَ · وَخُلَاصَةُ القَوْلِ · لَوْ عُولِجَ … لَتَحَسَّنَ · يُهَجَّرُ · بِأَنْ تُوَقِّعَ / أَنَّ الوَقْتَ · أَنْ تَتَحَرَّكَ. Close the vocabulary vault during each section.</a:t>
             </a:r>
             <a:endParaRPr lang="en-US" dirty="0"/>
@@ -2847,7 +2879,11 @@
           <a:lstStyle/>
           <a:p>
             <a:r>
-              <a:rPr lang="en-US" dirty="0"/>
+              <a:rPr lang="ar-SA" dirty="0">
+                <a:latin typeface="Amiri" pitchFamily="2" charset="-78"/>
+                <a:ea typeface="Amiri" pitchFamily="2" charset="-78"/>
+                <a:cs typeface="Amiri" pitchFamily="2" charset="-78"/>
+              </a:rPr>
               <a:t>LISTENING TEXT 1 · QUESTIONS 1–4 (website Part A, 20 marks). Before listening: label each question with the signal you expect (أُطْرُوحَتِي · صَحِيحٌ أَنَّ · غَيْرَ أَنَّ · يَتَطَلَّبُ / يَمْنَعُ / يَرْفُضُ أَنْ · سَـ / لَـ · كَانَ قَدْ) — P5-L10: follow the shape, and remember the point after صَحِيحٌ أَنَّ belongs to the OTHER side. Question 1: uṭrūḥatī anna = the thesis. Question 3: ṣaḥīḥun anna = the point conceded to the other side. Question 4: ghayra anna = the speaker’s real position. Each recording may be played twice; students answer after the second reading.
 SCRIPT: يَقُولُ الأَكَادِيمِيُّ: أُطْرُوحَتِي أَنَّ التَّفَاوُتَ الاجْتِمَاعِيَّ يُهَدِّدُ الاسْتِقْرَارَ فِي العَالَمِ العَرَبِيِّ. أَكَّدَتِ الدِّرَاسَاتُ أَنَّ أَكْثَرَ مِنْ مِئَةِ مِلْيُونِ عَرَبِيٍّ يَعِيشُونَ تَحْتَ حَدِّ الفَقْرِ. صَحِيحٌ أَنَّ الإِصْلَاحَاتِ تَحْتَاجُ وَقْتًا طَوِيلًا وَمَوَارِدَ ضَخْمَةً، غَيْرَ أَنَّ الحَاجَةَ الاجْتِمَاعِيَّةَ المُلِحَّةَ لَا تَتَحَمَّلُ الانْتِظَارَ. إِذَا اسْتُثْمِرَ فِي التَّعْلِيمِ المُبَكِّرِ، سَتَضِيقُ الفَجْوَةُ تَدْرِيجِيًّا. وَلَوْ عُولِجَ التَّفَاوُتُ قَبْلَ عُقُودٍ، لَتَحَسَّنَ الوَضْعُ كَثِيرًا. وَيَتَطَلَّبُ الوَضْعُ أَنْ تَتَحَرَّكَ الحُكُومَاتُ فَوْرًا. وَبِنَاءً عَلَى مَا سَبَقَ، فَمَوْقِفِي وَاضِحٌ: العَدَالَةُ الاجْتِمَاعِيَّةُ ضَرُورَةٌ لَا رَفَاهِيَةٌ.
 Private chat: 4 letters.</a:t>
@@ -3421,6 +3457,7 @@
                   <a:srgbClr val="D4AF37"/>
                 </a:solidFill>
                 <a:latin typeface="Amiri" pitchFamily="2" charset="-78"/>
+                <a:ea typeface="Amiri" pitchFamily="2" charset="-78"/>
                 <a:cs typeface="Amiri" pitchFamily="2" charset="-78"/>
               </a:rPr>
               <a:t>م</a:t>
@@ -3627,6 +3664,7 @@
                   <a:srgbClr val="D4AF37"/>
                 </a:solidFill>
                 <a:latin typeface="Amiri" pitchFamily="2" charset="-78"/>
+                <a:ea typeface="Amiri" pitchFamily="2" charset="-78"/>
                 <a:cs typeface="Amiri" pitchFamily="2" charset="-78"/>
               </a:rPr>
               <a:t>المُرَاجَعَةُ وَتَقْيِيمُ الوَحْدَةِ</a:t>
@@ -4084,6 +4122,7 @@
                   <a:srgbClr val="D4AF37"/>
                 </a:solidFill>
                 <a:latin typeface="Amiri" pitchFamily="2" charset="-78"/>
+                <a:ea typeface="Amiri" pitchFamily="2" charset="-78"/>
                 <a:cs typeface="Amiri" pitchFamily="2" charset="-78"/>
               </a:rPr>
               <a:t>م</a:t>
@@ -4404,6 +4443,7 @@
                   <a:srgbClr val="8A6D1E"/>
                 </a:solidFill>
                 <a:latin typeface="Amiri" pitchFamily="2" charset="-78"/>
+                <a:ea typeface="Amiri" pitchFamily="2" charset="-78"/>
                 <a:cs typeface="Amiri" pitchFamily="2" charset="-78"/>
               </a:rPr>
               <a:t>الاسْتِمَاعُ</a:t>
@@ -6327,6 +6367,7 @@
                   <a:srgbClr val="D4AF37"/>
                 </a:solidFill>
                 <a:latin typeface="Amiri" pitchFamily="2" charset="-78"/>
+                <a:ea typeface="Amiri" pitchFamily="2" charset="-78"/>
                 <a:cs typeface="Amiri" pitchFamily="2" charset="-78"/>
               </a:rPr>
               <a:t>م</a:t>
@@ -6647,6 +6688,7 @@
                   <a:srgbClr val="8A6D1E"/>
                 </a:solidFill>
                 <a:latin typeface="Amiri" pitchFamily="2" charset="-78"/>
+                <a:ea typeface="Amiri" pitchFamily="2" charset="-78"/>
                 <a:cs typeface="Amiri" pitchFamily="2" charset="-78"/>
               </a:rPr>
               <a:t>الإِجَابَاتُ</a:t>
@@ -7188,6 +7230,7 @@
                   <a:srgbClr val="8A6D1E"/>
                 </a:solidFill>
                 <a:latin typeface="Amiri" pitchFamily="2" charset="-78"/>
+                <a:ea typeface="Amiri" pitchFamily="2" charset="-78"/>
                 <a:cs typeface="Amiri" pitchFamily="2" charset="-78"/>
               </a:rPr>
               <a:t>إِذَا اسْتُثْمِرَ فِي التَّعْلِيمِ المُبَكِّرِ، سَتَضِيقُ الفَجْوَةُ.</a:t>
@@ -7691,6 +7734,7 @@
                   <a:srgbClr val="8A6D1E"/>
                 </a:solidFill>
                 <a:latin typeface="Amiri" pitchFamily="2" charset="-78"/>
+                <a:ea typeface="Amiri" pitchFamily="2" charset="-78"/>
                 <a:cs typeface="Amiri" pitchFamily="2" charset="-78"/>
               </a:rPr>
               <a:t>لَوْ عُولِجَ التَّفَاوُتُ قَبْلَ عُقُودٍ، لَتَحَسَّنَ الوَضْعُ كَثِيرًا.</a:t>
@@ -8194,6 +8238,7 @@
                   <a:srgbClr val="8A6D1E"/>
                 </a:solidFill>
                 <a:latin typeface="Amiri" pitchFamily="2" charset="-78"/>
+                <a:ea typeface="Amiri" pitchFamily="2" charset="-78"/>
                 <a:cs typeface="Amiri" pitchFamily="2" charset="-78"/>
               </a:rPr>
               <a:t>يَتَطَلَّبُ الوَضْعُ أَنْ تَتَحَرَّكَ الحُكُومَاتُ فَوْرًا.</a:t>
@@ -8697,6 +8742,7 @@
                   <a:srgbClr val="8A6D1E"/>
                 </a:solidFill>
                 <a:latin typeface="Amiri" pitchFamily="2" charset="-78"/>
+                <a:ea typeface="Amiri" pitchFamily="2" charset="-78"/>
                 <a:cs typeface="Amiri" pitchFamily="2" charset="-78"/>
               </a:rPr>
               <a:t>العَدَالَةُ الاجْتِمَاعِيَّةُ ضَرُورَةٌ لَا رَفَاهِيَةٌ</a:t>
@@ -8843,6 +8889,7 @@
                   <a:srgbClr val="D4AF37"/>
                 </a:solidFill>
                 <a:latin typeface="Amiri" pitchFamily="2" charset="-78"/>
+                <a:ea typeface="Amiri" pitchFamily="2" charset="-78"/>
                 <a:cs typeface="Amiri" pitchFamily="2" charset="-78"/>
               </a:rPr>
               <a:t>م</a:t>
@@ -9163,6 +9210,7 @@
                   <a:srgbClr val="8A6D1E"/>
                 </a:solidFill>
                 <a:latin typeface="Amiri" pitchFamily="2" charset="-78"/>
+                <a:ea typeface="Amiri" pitchFamily="2" charset="-78"/>
                 <a:cs typeface="Amiri" pitchFamily="2" charset="-78"/>
               </a:rPr>
               <a:t>الاسْتِمَاعُ</a:t>
@@ -11962,6 +12010,7 @@
                   <a:srgbClr val="D4AF37"/>
                 </a:solidFill>
                 <a:latin typeface="Amiri" pitchFamily="2" charset="-78"/>
+                <a:ea typeface="Amiri" pitchFamily="2" charset="-78"/>
                 <a:cs typeface="Amiri" pitchFamily="2" charset="-78"/>
               </a:rPr>
               <a:t>م</a:t>
@@ -12282,6 +12331,7 @@
                   <a:srgbClr val="8A6D1E"/>
                 </a:solidFill>
                 <a:latin typeface="Amiri" pitchFamily="2" charset="-78"/>
+                <a:ea typeface="Amiri" pitchFamily="2" charset="-78"/>
                 <a:cs typeface="Amiri" pitchFamily="2" charset="-78"/>
               </a:rPr>
               <a:t>الإِجَابَاتُ</a:t>
@@ -12823,6 +12873,7 @@
                   <a:srgbClr val="8A6D1E"/>
                 </a:solidFill>
                 <a:latin typeface="Amiri" pitchFamily="2" charset="-78"/>
+                <a:ea typeface="Amiri" pitchFamily="2" charset="-78"/>
                 <a:cs typeface="Amiri" pitchFamily="2" charset="-78"/>
               </a:rPr>
               <a:t>كَرِيمٌ: يَجِبُ أَنْ تُنَظِّمَ الدُّوَلُ الإِنْتِرْنِتَ.</a:t>
@@ -13326,6 +13377,7 @@
                   <a:srgbClr val="8A6D1E"/>
                 </a:solidFill>
                 <a:latin typeface="Amiri" pitchFamily="2" charset="-78"/>
+                <a:ea typeface="Amiri" pitchFamily="2" charset="-78"/>
                 <a:cs typeface="Amiri" pitchFamily="2" charset="-78"/>
               </a:rPr>
               <a:t>هُدَى: صَحِيحٌ أَنَّ التَّنْظِيمَ ضَرُورِيٌّ، غَيْرَ أَنَّهُ يَجِبُ أَلَّا يُقَيِّدَ حُرِّيَّةَ التَّعْبِيرِ.</a:t>
@@ -13829,6 +13881,7 @@
                   <a:srgbClr val="8A6D1E"/>
                 </a:solidFill>
                 <a:latin typeface="Amiri" pitchFamily="2" charset="-78"/>
+                <a:ea typeface="Amiri" pitchFamily="2" charset="-78"/>
                 <a:cs typeface="Amiri" pitchFamily="2" charset="-78"/>
               </a:rPr>
               <a:t>كَرِيمٌ: يَمْنَعُ القَانُونُ أَنْ تُبَاعَ البَيَانَاتُ الشَّخْصِيَّةُ.</a:t>
@@ -14332,6 +14385,7 @@
                   <a:srgbClr val="8A6D1E"/>
                 </a:solidFill>
                 <a:latin typeface="Amiri" pitchFamily="2" charset="-78"/>
+                <a:ea typeface="Amiri" pitchFamily="2" charset="-78"/>
                 <a:cs typeface="Amiri" pitchFamily="2" charset="-78"/>
               </a:rPr>
               <a:t>هُدَى: أَرْفُضُ أَنْ تُرَاقَبَ المُرَاسَلَاتُ الخَاصَّةُ دُونَ إِذْنٍ.</a:t>
@@ -14835,6 +14889,7 @@
                   <a:srgbClr val="8A6D1E"/>
                 </a:solidFill>
                 <a:latin typeface="Amiri" pitchFamily="2" charset="-78"/>
+                <a:ea typeface="Amiri" pitchFamily="2" charset="-78"/>
                 <a:cs typeface="Amiri" pitchFamily="2" charset="-78"/>
               </a:rPr>
               <a:t>كَرِيمٌ: لَوْ وُضِعَتْ حَوْكَمَةٌ رَقْمِيَّةٌ مُتَوَازِنَةٌ، لَكَانَتِ الخُصُوصِيَّةُ أَكْثَرَ أَمَانًا.</a:t>
@@ -15338,6 +15393,7 @@
                   <a:srgbClr val="8A6D1E"/>
                 </a:solidFill>
                 <a:latin typeface="Amiri" pitchFamily="2" charset="-78"/>
+                <a:ea typeface="Amiri" pitchFamily="2" charset="-78"/>
                 <a:cs typeface="Amiri" pitchFamily="2" charset="-78"/>
               </a:rPr>
               <a:t>هُدَى: وَبِنَاءً عَلَى مَا سَبَقَ، لَا بُدَّ مِنَ التَّوَازُنِ بَيْنَ الأَمْنِ وَالحُرِّيَّةِ.</a:t>
@@ -15471,6 +15527,7 @@
                   <a:srgbClr val="D4AF37"/>
                 </a:solidFill>
                 <a:latin typeface="Amiri" pitchFamily="2" charset="-78"/>
+                <a:ea typeface="Amiri" pitchFamily="2" charset="-78"/>
                 <a:cs typeface="Amiri" pitchFamily="2" charset="-78"/>
               </a:rPr>
               <a:t>م</a:t>
@@ -15791,6 +15848,7 @@
                   <a:srgbClr val="8A6D1E"/>
                 </a:solidFill>
                 <a:latin typeface="Amiri" pitchFamily="2" charset="-78"/>
+                <a:ea typeface="Amiri" pitchFamily="2" charset="-78"/>
                 <a:cs typeface="Amiri" pitchFamily="2" charset="-78"/>
               </a:rPr>
               <a:t>الاسْتِمَاعُ</a:t>
@@ -18590,6 +18648,7 @@
                   <a:srgbClr val="D4AF37"/>
                 </a:solidFill>
                 <a:latin typeface="Amiri" pitchFamily="2" charset="-78"/>
+                <a:ea typeface="Amiri" pitchFamily="2" charset="-78"/>
                 <a:cs typeface="Amiri" pitchFamily="2" charset="-78"/>
               </a:rPr>
               <a:t>م</a:t>
@@ -18910,6 +18969,7 @@
                   <a:srgbClr val="8A6D1E"/>
                 </a:solidFill>
                 <a:latin typeface="Amiri" pitchFamily="2" charset="-78"/>
+                <a:ea typeface="Amiri" pitchFamily="2" charset="-78"/>
                 <a:cs typeface="Amiri" pitchFamily="2" charset="-78"/>
               </a:rPr>
               <a:t>الإِجَابَاتُ</a:t>
@@ -19451,6 +19511,7 @@
                   <a:srgbClr val="8A6D1E"/>
                 </a:solidFill>
                 <a:latin typeface="Amiri" pitchFamily="2" charset="-78"/>
+                <a:ea typeface="Amiri" pitchFamily="2" charset="-78"/>
                 <a:cs typeface="Amiri" pitchFamily="2" charset="-78"/>
               </a:rPr>
               <a:t>كَانَتِ الأَجْيَالُ السَّابِقَةُ قَدْ نَاضَلَتْ مِنْ أَجْلِ الاسْتِقْلَالِ.</a:t>
@@ -19954,6 +20015,7 @@
                   <a:srgbClr val="8A6D1E"/>
                 </a:solidFill>
                 <a:latin typeface="Amiri" pitchFamily="2" charset="-78"/>
+                <a:ea typeface="Amiri" pitchFamily="2" charset="-78"/>
                 <a:cs typeface="Amiri" pitchFamily="2" charset="-78"/>
               </a:rPr>
               <a:t>جِيلُنَا فَيُعِيدُ تَعْرِيفَ المُشَارَكَةِ عَبْرَ الوَسَائِطِ الرَّقْمِيَّةِ.</a:t>
@@ -20457,6 +20519,7 @@
                   <a:srgbClr val="8A6D1E"/>
                 </a:solidFill>
                 <a:latin typeface="Amiri" pitchFamily="2" charset="-78"/>
+                <a:ea typeface="Amiri" pitchFamily="2" charset="-78"/>
                 <a:cs typeface="Amiri" pitchFamily="2" charset="-78"/>
               </a:rPr>
               <a:t>صَحِيحٌ أَنَّ التَّحَدِّيَاتِ كَبِيرَةٌ، غَيْرَ أَنَّ الطَّاقَاتِ أَكْبَرُ.</a:t>
@@ -20960,6 +21023,7 @@
                   <a:srgbClr val="8A6D1E"/>
                 </a:solidFill>
                 <a:latin typeface="Amiri" pitchFamily="2" charset="-78"/>
+                <a:ea typeface="Amiri" pitchFamily="2" charset="-78"/>
                 <a:cs typeface="Amiri" pitchFamily="2" charset="-78"/>
               </a:rPr>
               <a:t>نُطَالِبُ بِأَنْ تُفْتَحَ أَبْوَابُ المُشَارَكَةِ، وَنُصِرُّ عَلَى أَنْ نَكُونَ شُرَكَاءَ.</a:t>
@@ -21463,6 +21527,7 @@
                   <a:srgbClr val="8A6D1E"/>
                 </a:solidFill>
                 <a:latin typeface="Amiri" pitchFamily="2" charset="-78"/>
+                <a:ea typeface="Amiri" pitchFamily="2" charset="-78"/>
                 <a:cs typeface="Amiri" pitchFamily="2" charset="-78"/>
               </a:rPr>
               <a:t>لَوْ أُتِيحَتْ لَنَا الفُرَصُ، لَغَيَّرْنَا وَاقِعَنَا.</a:t>
@@ -21966,6 +22031,7 @@
                   <a:srgbClr val="8A6D1E"/>
                 </a:solidFill>
                 <a:latin typeface="Amiri" pitchFamily="2" charset="-78"/>
+                <a:ea typeface="Amiri" pitchFamily="2" charset="-78"/>
                 <a:cs typeface="Amiri" pitchFamily="2" charset="-78"/>
               </a:rPr>
               <a:t>وَبِنَاءً عَلَى مَا سَبَقَ، لَا تَنْمِيَةَ حَقِيقِيَّةً دُونَ تَمْكِينِ الشَّبَابِ.</a:t>
@@ -22099,6 +22165,7 @@
                   <a:srgbClr val="D4AF37"/>
                 </a:solidFill>
                 <a:latin typeface="Amiri" pitchFamily="2" charset="-78"/>
+                <a:ea typeface="Amiri" pitchFamily="2" charset="-78"/>
                 <a:cs typeface="Amiri" pitchFamily="2" charset="-78"/>
               </a:rPr>
               <a:t>م</a:t>
@@ -22419,6 +22486,7 @@
                   <a:srgbClr val="8A6D1E"/>
                 </a:solidFill>
                 <a:latin typeface="Amiri" pitchFamily="2" charset="-78"/>
+                <a:ea typeface="Amiri" pitchFamily="2" charset="-78"/>
                 <a:cs typeface="Amiri" pitchFamily="2" charset="-78"/>
               </a:rPr>
               <a:t>التَّنَقُّلُ الاجْتِمَاعِيُّ وَالعَدَالَةُ</a:t>
@@ -22532,6 +22600,7 @@
                   <a:srgbClr val="1F2A37"/>
                 </a:solidFill>
                 <a:latin typeface="Amiri" pitchFamily="2" charset="-78"/>
+                <a:ea typeface="Amiri" pitchFamily="2" charset="-78"/>
                 <a:cs typeface="Amiri" pitchFamily="2" charset="-78"/>
               </a:rPr>
               <a:t>يُشَارُ إِلَى أَنَّ التَّنَقُّلَ الاجْتِمَاعِيَّ الصَّاعِدَ يُعَدُّ مِقْيَاسًا لِعَدَالَةِ أَيِّ مُجْتَمَعٍ. أَكَّدَ البَاحِثُونَ أَنَّ التَّعْلِيمَ الجَيِّدَ يُفْضِي إِلَى فُرَصٍ أَوْسَعَ، وَأَنَّ الحِرْمَانَ المُبَكِّرَ يُكَرِّسُ الفَقْرَ. صَحِيحٌ أَنَّ الدَّوْلَةَ تَتَّخِذُ إِجْرَاءَاتٍ لِدَعْمِ الفُقَرَاءِ، غَيْرَ أَنَّ المُعِيقَاتِ البِنْيَوِيَّةَ لَا تَزَالُ تَحُولُ دُونَ تَكَافُؤِ الفُرَصِ. وَكَانَتْ بَرَامِجُ كَثِيرَةٌ قَدْ تَعَثَّرَتْ بِسَبَبِ ضَعْفِ التَّمْوِيلِ. وَيُطَالِبُ الخُبَرَاءُ بِأَنْ يُعَادَ تَوْزِيعُ الفُرَصِ. وَلَوْ وُجِّهَ الدَّعْمُ إِلَى التَّعْلِيمِ المُبَكِّرِ، لَتَحَسَّنَتْ فُرَصُ الصُّعُودِ. وَبِنَاءً عَلَى مَا سَبَقَ، يَتَطَلَّبُ تَحْقِيقُ العَدَالَةِ أَنْ تُعِيدَ الدَّوْلَةُ تَوْزِيعَ الفُرَصِ لِكَيْ يَصْعَدَ الجَمِيعُ.</a:t>
@@ -22665,6 +22734,7 @@
                   <a:srgbClr val="D4AF37"/>
                 </a:solidFill>
                 <a:latin typeface="Amiri" pitchFamily="2" charset="-78"/>
+                <a:ea typeface="Amiri" pitchFamily="2" charset="-78"/>
                 <a:cs typeface="Amiri" pitchFamily="2" charset="-78"/>
               </a:rPr>
               <a:t>م</a:t>
@@ -22985,6 +23055,7 @@
                   <a:srgbClr val="8A6D1E"/>
                 </a:solidFill>
                 <a:latin typeface="Amiri" pitchFamily="2" charset="-78"/>
+                <a:ea typeface="Amiri" pitchFamily="2" charset="-78"/>
                 <a:cs typeface="Amiri" pitchFamily="2" charset="-78"/>
               </a:rPr>
               <a:t>أَسْئِلَةُ القِرَاءَةِ</a:t>
@@ -25346,6 +25417,7 @@
                   <a:srgbClr val="D4AF37"/>
                 </a:solidFill>
                 <a:latin typeface="Amiri" pitchFamily="2" charset="-78"/>
+                <a:ea typeface="Amiri" pitchFamily="2" charset="-78"/>
                 <a:cs typeface="Amiri" pitchFamily="2" charset="-78"/>
               </a:rPr>
               <a:t>م</a:t>
@@ -25666,6 +25738,7 @@
                   <a:srgbClr val="8A6D1E"/>
                 </a:solidFill>
                 <a:latin typeface="Amiri" pitchFamily="2" charset="-78"/>
+                <a:ea typeface="Amiri" pitchFamily="2" charset="-78"/>
                 <a:cs typeface="Amiri" pitchFamily="2" charset="-78"/>
               </a:rPr>
               <a:t>الإِجَابَاتُ</a:t>
@@ -26207,6 +26280,7 @@
                   <a:srgbClr val="8A6D1E"/>
                 </a:solidFill>
                 <a:latin typeface="Amiri" pitchFamily="2" charset="-78"/>
+                <a:ea typeface="Amiri" pitchFamily="2" charset="-78"/>
                 <a:cs typeface="Amiri" pitchFamily="2" charset="-78"/>
               </a:rPr>
               <a:t>يُشَارُ إِلَى أَنَّ التَّنَقُّلَ الاجْتِمَاعِيَّ الصَّاعِدَ يُعَدُّ مِقْيَاسًا لِعَدَالَةِ أَيِّ مُجْتَمَعٍ.</a:t>
@@ -26710,6 +26784,7 @@
                   <a:srgbClr val="8A6D1E"/>
                 </a:solidFill>
                 <a:latin typeface="Amiri" pitchFamily="2" charset="-78"/>
+                <a:ea typeface="Amiri" pitchFamily="2" charset="-78"/>
                 <a:cs typeface="Amiri" pitchFamily="2" charset="-78"/>
               </a:rPr>
               <a:t>أَكَّدَ البَاحِثُونَ أَنَّ التَّعْلِيمَ الجَيِّدَ يُفْضِي إِلَى فُرَصٍ أَوْسَعَ.</a:t>
@@ -27213,6 +27288,7 @@
                   <a:srgbClr val="8A6D1E"/>
                 </a:solidFill>
                 <a:latin typeface="Amiri" pitchFamily="2" charset="-78"/>
+                <a:ea typeface="Amiri" pitchFamily="2" charset="-78"/>
                 <a:cs typeface="Amiri" pitchFamily="2" charset="-78"/>
               </a:rPr>
               <a:t>وَكَانَتْ بَرَامِجُ كَثِيرَةٌ قَدْ تَعَثَّرَتْ بِسَبَبِ ضَعْفِ التَّمْوِيلِ.</a:t>
@@ -27716,6 +27792,7 @@
                   <a:srgbClr val="8A6D1E"/>
                 </a:solidFill>
                 <a:latin typeface="Amiri" pitchFamily="2" charset="-78"/>
+                <a:ea typeface="Amiri" pitchFamily="2" charset="-78"/>
                 <a:cs typeface="Amiri" pitchFamily="2" charset="-78"/>
               </a:rPr>
               <a:t>صَحِيحٌ أَنَّ</a:t>
@@ -27742,6 +27819,7 @@
                   <a:srgbClr val="8A6D1E"/>
                 </a:solidFill>
                 <a:latin typeface="Amiri" pitchFamily="2" charset="-78"/>
+                <a:ea typeface="Amiri" pitchFamily="2" charset="-78"/>
                 <a:cs typeface="Amiri" pitchFamily="2" charset="-78"/>
               </a:rPr>
               <a:t>غَيْرَ أَنَّ</a:t>
@@ -28271,6 +28349,7 @@
                   <a:srgbClr val="8A6D1E"/>
                 </a:solidFill>
                 <a:latin typeface="Amiri" pitchFamily="2" charset="-78"/>
+                <a:ea typeface="Amiri" pitchFamily="2" charset="-78"/>
                 <a:cs typeface="Amiri" pitchFamily="2" charset="-78"/>
               </a:rPr>
               <a:t>صَحِيحٌ أَنَّ</a:t>
@@ -28297,6 +28376,7 @@
                   <a:srgbClr val="8A6D1E"/>
                 </a:solidFill>
                 <a:latin typeface="Amiri" pitchFamily="2" charset="-78"/>
+                <a:ea typeface="Amiri" pitchFamily="2" charset="-78"/>
                 <a:cs typeface="Amiri" pitchFamily="2" charset="-78"/>
               </a:rPr>
               <a:t>غَيْرَ أَنَّ</a:t>
@@ -28443,6 +28523,7 @@
                   <a:srgbClr val="D4AF37"/>
                 </a:solidFill>
                 <a:latin typeface="Amiri" pitchFamily="2" charset="-78"/>
+                <a:ea typeface="Amiri" pitchFamily="2" charset="-78"/>
                 <a:cs typeface="Amiri" pitchFamily="2" charset="-78"/>
               </a:rPr>
               <a:t>م</a:t>
@@ -28763,6 +28844,7 @@
                   <a:srgbClr val="8A6D1E"/>
                 </a:solidFill>
                 <a:latin typeface="Amiri" pitchFamily="2" charset="-78"/>
+                <a:ea typeface="Amiri" pitchFamily="2" charset="-78"/>
                 <a:cs typeface="Amiri" pitchFamily="2" charset="-78"/>
               </a:rPr>
               <a:t>أَسْئِلَةُ القِرَاءَةِ</a:t>
@@ -29387,6 +29469,7 @@
                   <a:srgbClr val="1B3B6F"/>
                 </a:solidFill>
                 <a:latin typeface="Amiri" pitchFamily="2" charset="-78"/>
+                <a:ea typeface="Amiri" pitchFamily="2" charset="-78"/>
                 <a:cs typeface="Amiri" pitchFamily="2" charset="-78"/>
               </a:rPr>
               <a:t>صَحِيحٌ أَنَّ الدَّوْلَةَ</a:t>
@@ -29413,6 +29496,7 @@
                   <a:srgbClr val="1B3B6F"/>
                 </a:solidFill>
                 <a:latin typeface="Amiri" pitchFamily="2" charset="-78"/>
+                <a:ea typeface="Amiri" pitchFamily="2" charset="-78"/>
                 <a:cs typeface="Amiri" pitchFamily="2" charset="-78"/>
               </a:rPr>
               <a:t>إِجْرَاءَاتٍ</a:t>
@@ -29527,6 +29611,7 @@
                   <a:srgbClr val="1F2A37"/>
                 </a:solidFill>
                 <a:latin typeface="Amiri" pitchFamily="2" charset="-78"/>
+                <a:ea typeface="Amiri" pitchFamily="2" charset="-78"/>
                 <a:cs typeface="Amiri" pitchFamily="2" charset="-78"/>
               </a:rPr>
               <a:t>تَتَّخِذَ</a:t>
@@ -29641,6 +29726,7 @@
                   <a:srgbClr val="1F2A37"/>
                 </a:solidFill>
                 <a:latin typeface="Amiri" pitchFamily="2" charset="-78"/>
+                <a:ea typeface="Amiri" pitchFamily="2" charset="-78"/>
                 <a:cs typeface="Amiri" pitchFamily="2" charset="-78"/>
               </a:rPr>
               <a:t>تَتَّخِذْ</a:t>
@@ -29755,6 +29841,7 @@
                   <a:srgbClr val="1F2A37"/>
                 </a:solidFill>
                 <a:latin typeface="Amiri" pitchFamily="2" charset="-78"/>
+                <a:ea typeface="Amiri" pitchFamily="2" charset="-78"/>
                 <a:cs typeface="Amiri" pitchFamily="2" charset="-78"/>
               </a:rPr>
               <a:t>تَتَّخِذُ</a:t>
@@ -29916,6 +30003,7 @@
                   <a:srgbClr val="1B3B6F"/>
                 </a:solidFill>
                 <a:latin typeface="Amiri" pitchFamily="2" charset="-78"/>
+                <a:ea typeface="Amiri" pitchFamily="2" charset="-78"/>
                 <a:cs typeface="Amiri" pitchFamily="2" charset="-78"/>
               </a:rPr>
               <a:t>يَتَطَلَّبُ تَحْقِيقُ العَدَالَةِ أَنْ</a:t>
@@ -29942,6 +30030,7 @@
                   <a:srgbClr val="1B3B6F"/>
                 </a:solidFill>
                 <a:latin typeface="Amiri" pitchFamily="2" charset="-78"/>
+                <a:ea typeface="Amiri" pitchFamily="2" charset="-78"/>
                 <a:cs typeface="Amiri" pitchFamily="2" charset="-78"/>
               </a:rPr>
               <a:t>الدَّوْلَةُ تَوْزِيعَ الفُرَصِ</a:t>
@@ -30056,6 +30145,7 @@
                   <a:srgbClr val="1F2A37"/>
                 </a:solidFill>
                 <a:latin typeface="Amiri" pitchFamily="2" charset="-78"/>
+                <a:ea typeface="Amiri" pitchFamily="2" charset="-78"/>
                 <a:cs typeface="Amiri" pitchFamily="2" charset="-78"/>
               </a:rPr>
               <a:t>تُعِيدُ</a:t>
@@ -30170,6 +30260,7 @@
                   <a:srgbClr val="1F2A37"/>
                 </a:solidFill>
                 <a:latin typeface="Amiri" pitchFamily="2" charset="-78"/>
+                <a:ea typeface="Amiri" pitchFamily="2" charset="-78"/>
                 <a:cs typeface="Amiri" pitchFamily="2" charset="-78"/>
               </a:rPr>
               <a:t>تُعِيدَ</a:t>
@@ -30284,6 +30375,7 @@
                   <a:srgbClr val="1F2A37"/>
                 </a:solidFill>
                 <a:latin typeface="Amiri" pitchFamily="2" charset="-78"/>
+                <a:ea typeface="Amiri" pitchFamily="2" charset="-78"/>
                 <a:cs typeface="Amiri" pitchFamily="2" charset="-78"/>
               </a:rPr>
               <a:t>تُعِيدْ</a:t>
@@ -30445,6 +30537,7 @@
                   <a:srgbClr val="1B3B6F"/>
                 </a:solidFill>
                 <a:latin typeface="Amiri" pitchFamily="2" charset="-78"/>
+                <a:ea typeface="Amiri" pitchFamily="2" charset="-78"/>
                 <a:cs typeface="Amiri" pitchFamily="2" charset="-78"/>
               </a:rPr>
               <a:t>يُطَالِبُ الخُبَرَاءُ</a:t>
@@ -30471,6 +30564,7 @@
                   <a:srgbClr val="1B3B6F"/>
                 </a:solidFill>
                 <a:latin typeface="Amiri" pitchFamily="2" charset="-78"/>
+                <a:ea typeface="Amiri" pitchFamily="2" charset="-78"/>
                 <a:cs typeface="Amiri" pitchFamily="2" charset="-78"/>
               </a:rPr>
               <a:t>أَنْ يُعَادَ تَوْزِيعُ الفُرَصِ</a:t>
@@ -30585,6 +30679,7 @@
                   <a:srgbClr val="1F2A37"/>
                 </a:solidFill>
                 <a:latin typeface="Amiri" pitchFamily="2" charset="-78"/>
+                <a:ea typeface="Amiri" pitchFamily="2" charset="-78"/>
                 <a:cs typeface="Amiri" pitchFamily="2" charset="-78"/>
               </a:rPr>
               <a:t>عَلَى</a:t>
@@ -30686,6 +30781,7 @@
                   <a:srgbClr val="1F2A37"/>
                 </a:solidFill>
                 <a:latin typeface="Amiri" pitchFamily="2" charset="-78"/>
+                <a:ea typeface="Amiri" pitchFamily="2" charset="-78"/>
                 <a:cs typeface="Amiri" pitchFamily="2" charset="-78"/>
               </a:rPr>
               <a:t>بِـ</a:t>
@@ -30787,6 +30883,7 @@
                   <a:srgbClr val="1F2A37"/>
                 </a:solidFill>
                 <a:latin typeface="Amiri" pitchFamily="2" charset="-78"/>
+                <a:ea typeface="Amiri" pitchFamily="2" charset="-78"/>
                 <a:cs typeface="Amiri" pitchFamily="2" charset="-78"/>
               </a:rPr>
               <a:t>إِلَى</a:t>
@@ -31358,6 +31455,7 @@
                   <a:srgbClr val="D4AF37"/>
                 </a:solidFill>
                 <a:latin typeface="Amiri" pitchFamily="2" charset="-78"/>
+                <a:ea typeface="Amiri" pitchFamily="2" charset="-78"/>
                 <a:cs typeface="Amiri" pitchFamily="2" charset="-78"/>
               </a:rPr>
               <a:t>م</a:t>
@@ -31678,6 +31776,7 @@
                   <a:srgbClr val="8A6D1E"/>
                 </a:solidFill>
                 <a:latin typeface="Amiri" pitchFamily="2" charset="-78"/>
+                <a:ea typeface="Amiri" pitchFamily="2" charset="-78"/>
                 <a:cs typeface="Amiri" pitchFamily="2" charset="-78"/>
               </a:rPr>
               <a:t>آدَابُ الصَّفِّ</a:t>
@@ -33209,6 +33308,7 @@
                   <a:srgbClr val="D4AF37"/>
                 </a:solidFill>
                 <a:latin typeface="Amiri" pitchFamily="2" charset="-78"/>
+                <a:ea typeface="Amiri" pitchFamily="2" charset="-78"/>
                 <a:cs typeface="Amiri" pitchFamily="2" charset="-78"/>
               </a:rPr>
               <a:t>م</a:t>
@@ -33529,6 +33629,7 @@
                   <a:srgbClr val="8A6D1E"/>
                 </a:solidFill>
                 <a:latin typeface="Amiri" pitchFamily="2" charset="-78"/>
+                <a:ea typeface="Amiri" pitchFamily="2" charset="-78"/>
                 <a:cs typeface="Amiri" pitchFamily="2" charset="-78"/>
               </a:rPr>
               <a:t>الإِجَابَاتُ</a:t>
@@ -34070,6 +34171,7 @@
                   <a:srgbClr val="8A6D1E"/>
                 </a:solidFill>
                 <a:latin typeface="Amiri" pitchFamily="2" charset="-78"/>
+                <a:ea typeface="Amiri" pitchFamily="2" charset="-78"/>
                 <a:cs typeface="Amiri" pitchFamily="2" charset="-78"/>
               </a:rPr>
               <a:t>لَوْ وُجِّهَ الدَّعْمُ … لَتَحَسَّنَتْ</a:t>
@@ -34231,6 +34333,7 @@
                   <a:srgbClr val="1B3B6F"/>
                 </a:solidFill>
                 <a:latin typeface="Amiri" pitchFamily="2" charset="-78"/>
+                <a:ea typeface="Amiri" pitchFamily="2" charset="-78"/>
                 <a:cs typeface="Amiri" pitchFamily="2" charset="-78"/>
               </a:rPr>
               <a:t>صَحِيحٌ أَنَّ الدَّوْلَةَ</a:t>
@@ -34257,6 +34360,7 @@
                   <a:srgbClr val="1B3B6F"/>
                 </a:solidFill>
                 <a:latin typeface="Amiri" pitchFamily="2" charset="-78"/>
+                <a:ea typeface="Amiri" pitchFamily="2" charset="-78"/>
                 <a:cs typeface="Amiri" pitchFamily="2" charset="-78"/>
               </a:rPr>
               <a:t>إِجْرَاءَاتٍ</a:t>
@@ -34371,6 +34475,7 @@
                   <a:srgbClr val="9AA1AB"/>
                 </a:solidFill>
                 <a:latin typeface="Amiri" pitchFamily="2" charset="-78"/>
+                <a:ea typeface="Amiri" pitchFamily="2" charset="-78"/>
                 <a:cs typeface="Amiri" pitchFamily="2" charset="-78"/>
               </a:rPr>
               <a:t>تَتَّخِذَ</a:t>
@@ -34485,6 +34590,7 @@
                   <a:srgbClr val="9AA1AB"/>
                 </a:solidFill>
                 <a:latin typeface="Amiri" pitchFamily="2" charset="-78"/>
+                <a:ea typeface="Amiri" pitchFamily="2" charset="-78"/>
                 <a:cs typeface="Amiri" pitchFamily="2" charset="-78"/>
               </a:rPr>
               <a:t>تَتَّخِذْ</a:t>
@@ -34626,6 +34732,7 @@
                   <a:srgbClr val="1F2A37"/>
                 </a:solidFill>
                 <a:latin typeface="Amiri" pitchFamily="2" charset="-78"/>
+                <a:ea typeface="Amiri" pitchFamily="2" charset="-78"/>
                 <a:cs typeface="Amiri" pitchFamily="2" charset="-78"/>
               </a:rPr>
               <a:t>تَتَّخِذُ</a:t>
@@ -34690,6 +34797,7 @@
                   <a:srgbClr val="8A6D1E"/>
                 </a:solidFill>
                 <a:latin typeface="Amiri" pitchFamily="2" charset="-78"/>
+                <a:ea typeface="Amiri" pitchFamily="2" charset="-78"/>
                 <a:cs typeface="Amiri" pitchFamily="2" charset="-78"/>
               </a:rPr>
               <a:t>صَحِيحٌ أَنَّ</a:t>
@@ -34851,6 +34959,7 @@
                   <a:srgbClr val="1B3B6F"/>
                 </a:solidFill>
                 <a:latin typeface="Amiri" pitchFamily="2" charset="-78"/>
+                <a:ea typeface="Amiri" pitchFamily="2" charset="-78"/>
                 <a:cs typeface="Amiri" pitchFamily="2" charset="-78"/>
               </a:rPr>
               <a:t>يَتَطَلَّبُ تَحْقِيقُ العَدَالَةِ أَنْ</a:t>
@@ -34877,6 +34986,7 @@
                   <a:srgbClr val="1B3B6F"/>
                 </a:solidFill>
                 <a:latin typeface="Amiri" pitchFamily="2" charset="-78"/>
+                <a:ea typeface="Amiri" pitchFamily="2" charset="-78"/>
                 <a:cs typeface="Amiri" pitchFamily="2" charset="-78"/>
               </a:rPr>
               <a:t>الدَّوْلَةُ تَوْزِيعَ الفُرَصِ</a:t>
@@ -34991,6 +35101,7 @@
                   <a:srgbClr val="9AA1AB"/>
                 </a:solidFill>
                 <a:latin typeface="Amiri" pitchFamily="2" charset="-78"/>
+                <a:ea typeface="Amiri" pitchFamily="2" charset="-78"/>
                 <a:cs typeface="Amiri" pitchFamily="2" charset="-78"/>
               </a:rPr>
               <a:t>تُعِيدُ</a:t>
@@ -35132,6 +35243,7 @@
                   <a:srgbClr val="1F2A37"/>
                 </a:solidFill>
                 <a:latin typeface="Amiri" pitchFamily="2" charset="-78"/>
+                <a:ea typeface="Amiri" pitchFamily="2" charset="-78"/>
                 <a:cs typeface="Amiri" pitchFamily="2" charset="-78"/>
               </a:rPr>
               <a:t>تُعِيدَ</a:t>
@@ -35246,6 +35358,7 @@
                   <a:srgbClr val="9AA1AB"/>
                 </a:solidFill>
                 <a:latin typeface="Amiri" pitchFamily="2" charset="-78"/>
+                <a:ea typeface="Amiri" pitchFamily="2" charset="-78"/>
                 <a:cs typeface="Amiri" pitchFamily="2" charset="-78"/>
               </a:rPr>
               <a:t>تُعِيدْ</a:t>
@@ -35310,6 +35423,7 @@
                   <a:srgbClr val="8A6D1E"/>
                 </a:solidFill>
                 <a:latin typeface="Amiri" pitchFamily="2" charset="-78"/>
+                <a:ea typeface="Amiri" pitchFamily="2" charset="-78"/>
                 <a:cs typeface="Amiri" pitchFamily="2" charset="-78"/>
               </a:rPr>
               <a:t>أَنْ</a:t>
@@ -35336,6 +35450,7 @@
                   <a:srgbClr val="8A6D1E"/>
                 </a:solidFill>
                 <a:latin typeface="Amiri" pitchFamily="2" charset="-78"/>
+                <a:ea typeface="Amiri" pitchFamily="2" charset="-78"/>
                 <a:cs typeface="Amiri" pitchFamily="2" charset="-78"/>
               </a:rPr>
               <a:t>يَتَطَلَّبُ</a:t>
@@ -35362,6 +35477,7 @@
                   <a:srgbClr val="8A6D1E"/>
                 </a:solidFill>
                 <a:latin typeface="Amiri" pitchFamily="2" charset="-78"/>
+                <a:ea typeface="Amiri" pitchFamily="2" charset="-78"/>
                 <a:cs typeface="Amiri" pitchFamily="2" charset="-78"/>
               </a:rPr>
               <a:t>تُعِيدَ</a:t>
@@ -35523,6 +35639,7 @@
                   <a:srgbClr val="1B3B6F"/>
                 </a:solidFill>
                 <a:latin typeface="Amiri" pitchFamily="2" charset="-78"/>
+                <a:ea typeface="Amiri" pitchFamily="2" charset="-78"/>
                 <a:cs typeface="Amiri" pitchFamily="2" charset="-78"/>
               </a:rPr>
               <a:t>يُطَالِبُ الخُبَرَاءُ</a:t>
@@ -35549,6 +35666,7 @@
                   <a:srgbClr val="1B3B6F"/>
                 </a:solidFill>
                 <a:latin typeface="Amiri" pitchFamily="2" charset="-78"/>
+                <a:ea typeface="Amiri" pitchFamily="2" charset="-78"/>
                 <a:cs typeface="Amiri" pitchFamily="2" charset="-78"/>
               </a:rPr>
               <a:t>أَنْ يُعَادَ تَوْزِيعُ الفُرَصِ</a:t>
@@ -35663,6 +35781,7 @@
                   <a:srgbClr val="9AA1AB"/>
                 </a:solidFill>
                 <a:latin typeface="Amiri" pitchFamily="2" charset="-78"/>
+                <a:ea typeface="Amiri" pitchFamily="2" charset="-78"/>
                 <a:cs typeface="Amiri" pitchFamily="2" charset="-78"/>
               </a:rPr>
               <a:t>عَلَى</a:t>
@@ -35791,6 +35910,7 @@
                   <a:srgbClr val="1F2A37"/>
                 </a:solidFill>
                 <a:latin typeface="Amiri" pitchFamily="2" charset="-78"/>
+                <a:ea typeface="Amiri" pitchFamily="2" charset="-78"/>
                 <a:cs typeface="Amiri" pitchFamily="2" charset="-78"/>
               </a:rPr>
               <a:t>بِـ</a:t>
@@ -35892,6 +36012,7 @@
                   <a:srgbClr val="9AA1AB"/>
                 </a:solidFill>
                 <a:latin typeface="Amiri" pitchFamily="2" charset="-78"/>
+                <a:ea typeface="Amiri" pitchFamily="2" charset="-78"/>
                 <a:cs typeface="Amiri" pitchFamily="2" charset="-78"/>
               </a:rPr>
               <a:t>إِلَى</a:t>
@@ -35930,6 +36051,7 @@
                   <a:srgbClr val="8A6D1E"/>
                 </a:solidFill>
                 <a:latin typeface="Amiri" pitchFamily="2" charset="-78"/>
+                <a:ea typeface="Amiri" pitchFamily="2" charset="-78"/>
                 <a:cs typeface="Amiri" pitchFamily="2" charset="-78"/>
               </a:rPr>
               <a:t>يُطَالِبُ</a:t>
@@ -35956,6 +36078,7 @@
                   <a:srgbClr val="8A6D1E"/>
                 </a:solidFill>
                 <a:latin typeface="Amiri" pitchFamily="2" charset="-78"/>
+                <a:ea typeface="Amiri" pitchFamily="2" charset="-78"/>
                 <a:cs typeface="Amiri" pitchFamily="2" charset="-78"/>
               </a:rPr>
               <a:t>بِـ</a:t>
@@ -35982,6 +36105,7 @@
                   <a:srgbClr val="8A6D1E"/>
                 </a:solidFill>
                 <a:latin typeface="Amiri" pitchFamily="2" charset="-78"/>
+                <a:ea typeface="Amiri" pitchFamily="2" charset="-78"/>
                 <a:cs typeface="Amiri" pitchFamily="2" charset="-78"/>
               </a:rPr>
               <a:t>أَنْ</a:t>
@@ -36498,6 +36622,7 @@
                   <a:srgbClr val="8A6D1E"/>
                 </a:solidFill>
                 <a:latin typeface="Amiri" pitchFamily="2" charset="-78"/>
+                <a:ea typeface="Amiri" pitchFamily="2" charset="-78"/>
                 <a:cs typeface="Amiri" pitchFamily="2" charset="-78"/>
               </a:rPr>
               <a:t>يَتَطَلَّبُ تَحْقِيقُ العَدَالَةِ أَنْ تُعِيدَ الدَّوْلَةُ تَوْزِيعَ الفُرَصِ.</a:t>
@@ -36631,6 +36756,7 @@
                   <a:srgbClr val="D4AF37"/>
                 </a:solidFill>
                 <a:latin typeface="Amiri" pitchFamily="2" charset="-78"/>
+                <a:ea typeface="Amiri" pitchFamily="2" charset="-78"/>
                 <a:cs typeface="Amiri" pitchFamily="2" charset="-78"/>
               </a:rPr>
               <a:t>م</a:t>
@@ -36951,6 +37077,7 @@
                   <a:srgbClr val="8A6D1E"/>
                 </a:solidFill>
                 <a:latin typeface="Amiri" pitchFamily="2" charset="-78"/>
+                <a:ea typeface="Amiri" pitchFamily="2" charset="-78"/>
                 <a:cs typeface="Amiri" pitchFamily="2" charset="-78"/>
               </a:rPr>
               <a:t>اسْتِمَارَةُ الحُجَّةِ</a:t>
@@ -37231,6 +37358,7 @@
                   <a:srgbClr val="1B3B6F"/>
                 </a:solidFill>
                 <a:latin typeface="Amiri" pitchFamily="2" charset="-78"/>
+                <a:ea typeface="Amiri" pitchFamily="2" charset="-78"/>
                 <a:cs typeface="Amiri" pitchFamily="2" charset="-78"/>
               </a:rPr>
               <a:t>القَضِيَّةُ الاجْتِمَاعِيَّةُ الرَّئِيسِيَّةُ الَّتِي تُعَالِجُهَا</a:t>
@@ -37437,6 +37565,7 @@
                   <a:srgbClr val="1B3B6F"/>
                 </a:solidFill>
                 <a:latin typeface="Amiri" pitchFamily="2" charset="-78"/>
+                <a:ea typeface="Amiri" pitchFamily="2" charset="-78"/>
                 <a:cs typeface="Amiri" pitchFamily="2" charset="-78"/>
               </a:rPr>
               <a:t>دَلِيلٌ إِحْصَائِيٌّ بِكَلَامٍ مَنْقُولٍ</a:t>
@@ -37643,6 +37772,7 @@
                   <a:srgbClr val="1B3B6F"/>
                 </a:solidFill>
                 <a:latin typeface="Amiri" pitchFamily="2" charset="-78"/>
+                <a:ea typeface="Amiri" pitchFamily="2" charset="-78"/>
                 <a:cs typeface="Amiri" pitchFamily="2" charset="-78"/>
               </a:rPr>
               <a:t>تَسْلِيمٌ بِالرَّأْيِ المُضَادِّ</a:t>
@@ -37849,6 +37979,7 @@
                   <a:srgbClr val="1B3B6F"/>
                 </a:solidFill>
                 <a:latin typeface="Amiri" pitchFamily="2" charset="-78"/>
+                <a:ea typeface="Amiri" pitchFamily="2" charset="-78"/>
                 <a:cs typeface="Amiri" pitchFamily="2" charset="-78"/>
               </a:rPr>
               <a:t>رَدٌّ</a:t>
@@ -38055,6 +38186,7 @@
                   <a:srgbClr val="1B3B6F"/>
                 </a:solidFill>
                 <a:latin typeface="Amiri" pitchFamily="2" charset="-78"/>
+                <a:ea typeface="Amiri" pitchFamily="2" charset="-78"/>
                 <a:cs typeface="Amiri" pitchFamily="2" charset="-78"/>
               </a:rPr>
               <a:t>خَاتِمَةٌ</a:t>
@@ -38209,6 +38341,7 @@
                   <a:srgbClr val="1B3B6F"/>
                 </a:solidFill>
                 <a:latin typeface="Amiri" pitchFamily="2" charset="-78"/>
+                <a:ea typeface="Amiri" pitchFamily="2" charset="-78"/>
                 <a:cs typeface="Amiri" pitchFamily="2" charset="-78"/>
               </a:rPr>
               <a:t>الفَجْوَةُ الرَّقْمِيَّةُ</a:t>
@@ -38235,6 +38368,7 @@
                   <a:srgbClr val="1B3B6F"/>
                 </a:solidFill>
                 <a:latin typeface="Amiri" pitchFamily="2" charset="-78"/>
+                <a:ea typeface="Amiri" pitchFamily="2" charset="-78"/>
                 <a:cs typeface="Amiri" pitchFamily="2" charset="-78"/>
               </a:rPr>
               <a:t>أَكَّدَتِ الدِّرَاسَاتُ أَنَّ</a:t>
@@ -38261,6 +38395,7 @@
                   <a:srgbClr val="1B3B6F"/>
                 </a:solidFill>
                 <a:latin typeface="Amiri" pitchFamily="2" charset="-78"/>
+                <a:ea typeface="Amiri" pitchFamily="2" charset="-78"/>
                 <a:cs typeface="Amiri" pitchFamily="2" charset="-78"/>
               </a:rPr>
               <a:t>صَحِيحٌ أَنَّ التِّقْنِيَّةَ تُوَفِّرُ فُرَصًا</a:t>
@@ -38287,6 +38422,7 @@
                   <a:srgbClr val="1B3B6F"/>
                 </a:solidFill>
                 <a:latin typeface="Amiri" pitchFamily="2" charset="-78"/>
+                <a:ea typeface="Amiri" pitchFamily="2" charset="-78"/>
                 <a:cs typeface="Amiri" pitchFamily="2" charset="-78"/>
               </a:rPr>
               <a:t>غَيْرَ أَنَّهَا تُعَمِّقُ الفَجْوَةَ</a:t>
@@ -38313,6 +38449,7 @@
                   <a:srgbClr val="1B3B6F"/>
                 </a:solidFill>
                 <a:latin typeface="Amiri" pitchFamily="2" charset="-78"/>
+                <a:ea typeface="Amiri" pitchFamily="2" charset="-78"/>
                 <a:cs typeface="Amiri" pitchFamily="2" charset="-78"/>
               </a:rPr>
               <a:t>وَبِنَاءً عَلَى مَا سَبَقَ، يَتَطَلَّبُ الأَمْرُ أَنْ نَسْتَثْمِرَ</a:t>
@@ -38459,6 +38596,7 @@
                   <a:srgbClr val="D4AF37"/>
                 </a:solidFill>
                 <a:latin typeface="Amiri" pitchFamily="2" charset="-78"/>
+                <a:ea typeface="Amiri" pitchFamily="2" charset="-78"/>
                 <a:cs typeface="Amiri" pitchFamily="2" charset="-78"/>
               </a:rPr>
               <a:t>م</a:t>
@@ -38779,6 +38917,7 @@
                   <a:srgbClr val="8A6D1E"/>
                 </a:solidFill>
                 <a:latin typeface="Amiri" pitchFamily="2" charset="-78"/>
+                <a:ea typeface="Amiri" pitchFamily="2" charset="-78"/>
                 <a:cs typeface="Amiri" pitchFamily="2" charset="-78"/>
               </a:rPr>
               <a:t>مَقَالٌ حِجَاجِيٌّ</a:t>
@@ -39593,6 +39732,7 @@
                   <a:srgbClr val="D4AF37"/>
                 </a:solidFill>
                 <a:latin typeface="Amiri" pitchFamily="2" charset="-78"/>
+                <a:ea typeface="Amiri" pitchFamily="2" charset="-78"/>
                 <a:cs typeface="Amiri" pitchFamily="2" charset="-78"/>
               </a:rPr>
               <a:t>م</a:t>
@@ -39913,6 +40053,7 @@
                   <a:srgbClr val="8A6D1E"/>
                 </a:solidFill>
                 <a:latin typeface="Amiri" pitchFamily="2" charset="-78"/>
+                <a:ea typeface="Amiri" pitchFamily="2" charset="-78"/>
                 <a:cs typeface="Amiri" pitchFamily="2" charset="-78"/>
               </a:rPr>
               <a:t>فِي مُؤْتَمَرِ العَدَالَةِ الاجْتِمَاعِيَّةِ</a:t>
@@ -40155,6 +40296,7 @@
                   <a:srgbClr val="1B3B6F"/>
                 </a:solidFill>
                 <a:latin typeface="Amiri" pitchFamily="2" charset="-78"/>
+                <a:ea typeface="Amiri" pitchFamily="2" charset="-78"/>
                 <a:cs typeface="Amiri" pitchFamily="2" charset="-78"/>
               </a:rPr>
               <a:t>قَدِّمِ القَضِيَّةَ الاجْتِمَاعِيَّةَ الَّتِي تُعَالِجُهَا.</a:t>
@@ -40258,6 +40400,7 @@
                   <a:srgbClr val="1B3B6F"/>
                 </a:solidFill>
                 <a:latin typeface="Amiri" pitchFamily="2" charset="-78"/>
+                <a:ea typeface="Amiri" pitchFamily="2" charset="-78"/>
                 <a:cs typeface="Amiri" pitchFamily="2" charset="-78"/>
               </a:rPr>
               <a:t>قُلْ مَا الَّذِي تُوَافِقُ عَلَيْهِ فِي المَوْقِفِ المُضَادِّ.</a:t>
@@ -40361,6 +40504,7 @@
                   <a:srgbClr val="1B3B6F"/>
                 </a:solidFill>
                 <a:latin typeface="Amiri" pitchFamily="2" charset="-78"/>
+                <a:ea typeface="Amiri" pitchFamily="2" charset="-78"/>
                 <a:cs typeface="Amiri" pitchFamily="2" charset="-78"/>
               </a:rPr>
               <a:t>اعْرِضْ حُجَّتَكَ الأَقْوَى.</a:t>
@@ -40464,6 +40608,7 @@
                   <a:srgbClr val="1B3B6F"/>
                 </a:solidFill>
                 <a:latin typeface="Amiri" pitchFamily="2" charset="-78"/>
+                <a:ea typeface="Amiri" pitchFamily="2" charset="-78"/>
                 <a:cs typeface="Amiri" pitchFamily="2" charset="-78"/>
               </a:rPr>
               <a:t>اذْكُرْ مَا الَّذِي يَتَطَلَّبُهُ الحَلُّ.</a:t>
@@ -40635,6 +40780,7 @@
                   <a:srgbClr val="D4AF37"/>
                 </a:solidFill>
                 <a:latin typeface="Amiri" pitchFamily="2" charset="-78"/>
+                <a:ea typeface="Amiri" pitchFamily="2" charset="-78"/>
                 <a:cs typeface="Amiri" pitchFamily="2" charset="-78"/>
               </a:rPr>
               <a:t>م</a:t>
@@ -40955,6 +41101,7 @@
                   <a:srgbClr val="8A6D1E"/>
                 </a:solidFill>
                 <a:latin typeface="Amiri" pitchFamily="2" charset="-78"/>
+                <a:ea typeface="Amiri" pitchFamily="2" charset="-78"/>
                 <a:cs typeface="Amiri" pitchFamily="2" charset="-78"/>
               </a:rPr>
               <a:t>المُحَادَثَةُ</a:t>
@@ -41197,6 +41344,7 @@
                   <a:srgbClr val="1B3B6F"/>
                 </a:solidFill>
                 <a:latin typeface="Amiri" pitchFamily="2" charset="-78"/>
+                <a:ea typeface="Amiri" pitchFamily="2" charset="-78"/>
                 <a:cs typeface="Amiri" pitchFamily="2" charset="-78"/>
               </a:rPr>
               <a:t>مَا أَكْبَرُ تَحَدٍّ اجْتِمَاعِيٍّ يُوَاجِهُ العَالَمَ العَرَبِيَّ اليَوْمَ؟</a:t>
@@ -41300,6 +41448,7 @@
                   <a:srgbClr val="1B3B6F"/>
                 </a:solidFill>
                 <a:latin typeface="Amiri" pitchFamily="2" charset="-78"/>
+                <a:ea typeface="Amiri" pitchFamily="2" charset="-78"/>
                 <a:cs typeface="Amiri" pitchFamily="2" charset="-78"/>
               </a:rPr>
               <a:t>هَلْ تَعْتَقِدُ أَنَّ التَّكْنُولُوجِيَا تُعَمِّقُ أَمْ تُقَلِّلُ عَدَمَ المُسَاوَاةِ؟</a:t>
@@ -41403,6 +41552,7 @@
                   <a:srgbClr val="1B3B6F"/>
                 </a:solidFill>
                 <a:latin typeface="Amiri" pitchFamily="2" charset="-78"/>
+                <a:ea typeface="Amiri" pitchFamily="2" charset="-78"/>
                 <a:cs typeface="Amiri" pitchFamily="2" charset="-78"/>
               </a:rPr>
               <a:t>لَوْ كُنْتَ فِي مَوْقِعِ السُّلْطَةِ، مَاذَا كُنْتَ سَتُغَيِّرُ أَوَّلًا؟</a:t>
@@ -41574,6 +41724,7 @@
                   <a:srgbClr val="D4AF37"/>
                 </a:solidFill>
                 <a:latin typeface="Amiri" pitchFamily="2" charset="-78"/>
+                <a:ea typeface="Amiri" pitchFamily="2" charset="-78"/>
                 <a:cs typeface="Amiri" pitchFamily="2" charset="-78"/>
               </a:rPr>
               <a:t>م</a:t>
@@ -41894,6 +42045,7 @@
                   <a:srgbClr val="8A6D1E"/>
                 </a:solidFill>
                 <a:latin typeface="Amiri" pitchFamily="2" charset="-78"/>
+                <a:ea typeface="Amiri" pitchFamily="2" charset="-78"/>
                 <a:cs typeface="Amiri" pitchFamily="2" charset="-78"/>
               </a:rPr>
               <a:t>مِلَفُّ المَهَارَاتِ</a:t>
@@ -43066,6 +43218,7 @@
                   <a:srgbClr val="D4AF37"/>
                 </a:solidFill>
                 <a:latin typeface="Amiri" pitchFamily="2" charset="-78"/>
+                <a:ea typeface="Amiri" pitchFamily="2" charset="-78"/>
                 <a:cs typeface="Amiri" pitchFamily="2" charset="-78"/>
               </a:rPr>
               <a:t>م</a:t>
@@ -43386,6 +43539,7 @@
                   <a:srgbClr val="8A6D1E"/>
                 </a:solidFill>
                 <a:latin typeface="Amiri" pitchFamily="2" charset="-78"/>
+                <a:ea typeface="Amiri" pitchFamily="2" charset="-78"/>
                 <a:cs typeface="Amiri" pitchFamily="2" charset="-78"/>
               </a:rPr>
               <a:t>قَيِّمْ عَمَلَكَ</a:t>
@@ -44543,6 +44697,7 @@
                   <a:srgbClr val="D4AF37"/>
                 </a:solidFill>
                 <a:latin typeface="Amiri" pitchFamily="2" charset="-78"/>
+                <a:ea typeface="Amiri" pitchFamily="2" charset="-78"/>
                 <a:cs typeface="Amiri" pitchFamily="2" charset="-78"/>
               </a:rPr>
               <a:t>م</a:t>
@@ -44863,6 +45018,7 @@
                   <a:srgbClr val="8A6D1E"/>
                 </a:solidFill>
                 <a:latin typeface="Amiri" pitchFamily="2" charset="-78"/>
+                <a:ea typeface="Amiri" pitchFamily="2" charset="-78"/>
                 <a:cs typeface="Amiri" pitchFamily="2" charset="-78"/>
               </a:rPr>
               <a:t>التَّحْضِيرُ لِلدَّرْسِ القَادِمِ</a:t>
@@ -45076,6 +45232,7 @@
                   <a:srgbClr val="1B3B6F"/>
                 </a:solidFill>
                 <a:latin typeface="Amiri" pitchFamily="2" charset="-78"/>
+                <a:ea typeface="Amiri" pitchFamily="2" charset="-78"/>
                 <a:cs typeface="Amiri" pitchFamily="2" charset="-78"/>
               </a:rPr>
               <a:t>وَرَقَةُ الامْتِحَانِ</a:t>
@@ -45122,11 +45279,12 @@
               <a:buNone/>
             </a:pPr>
             <a:r>
-              <a:rPr lang="en-US" sz="1000" i="1" dirty="0">
+              <a:rPr lang="ar-SA" sz="1000" i="1" dirty="0">
                 <a:solidFill>
                   <a:srgbClr val="5A6472"/>
                 </a:solidFill>
                 <a:latin typeface="Calibri" pitchFamily="34" charset="0"/>
+                <a:ea typeface="Amiri" pitchFamily="2" charset="-78"/>
                 <a:cs typeface="Amiri" pitchFamily="2" charset="-78"/>
               </a:rPr>
               <a:t>  pl. أَوْرَاقُ</a:t>
@@ -45165,6 +45323,7 @@
                   <a:srgbClr val="1B3B6F"/>
                 </a:solidFill>
                 <a:latin typeface="Amiri" pitchFamily="2" charset="-78"/>
+                <a:ea typeface="Amiri" pitchFamily="2" charset="-78"/>
                 <a:cs typeface="Amiri" pitchFamily="2" charset="-78"/>
               </a:rPr>
               <a:t>مَعَايِيرُ التَّقْيِيمِ</a:t>
@@ -45211,11 +45370,12 @@
               <a:buNone/>
             </a:pPr>
             <a:r>
-              <a:rPr lang="en-US" sz="1000" i="1" dirty="0">
+              <a:rPr lang="ar-SA" sz="1000" i="1" dirty="0">
                 <a:solidFill>
                   <a:srgbClr val="5A6472"/>
                 </a:solidFill>
                 <a:latin typeface="Calibri" pitchFamily="34" charset="0"/>
+                <a:ea typeface="Amiri" pitchFamily="2" charset="-78"/>
                 <a:cs typeface="Amiri" pitchFamily="2" charset="-78"/>
               </a:rPr>
               <a:t>  sg. مِعْيَارٌ</a:t>
@@ -45254,6 +45414,7 @@
                   <a:srgbClr val="1B3B6F"/>
                 </a:solidFill>
                 <a:latin typeface="Amiri" pitchFamily="2" charset="-78"/>
+                <a:ea typeface="Amiri" pitchFamily="2" charset="-78"/>
                 <a:cs typeface="Amiri" pitchFamily="2" charset="-78"/>
               </a:rPr>
               <a:t>جَاهِزِيَّةُ الامْتِحَانِ</a:t>
@@ -45343,6 +45504,7 @@
                   <a:srgbClr val="1B3B6F"/>
                 </a:solidFill>
                 <a:latin typeface="Amiri" pitchFamily="2" charset="-78"/>
+                <a:ea typeface="Amiri" pitchFamily="2" charset="-78"/>
                 <a:cs typeface="Amiri" pitchFamily="2" charset="-78"/>
               </a:rPr>
               <a:t>نُقْطَةُ قُوَّةٍ</a:t>
@@ -45389,11 +45551,12 @@
               <a:buNone/>
             </a:pPr>
             <a:r>
-              <a:rPr lang="en-US" sz="1000" i="1" dirty="0">
+              <a:rPr lang="ar-SA" sz="1000" i="1" dirty="0">
                 <a:solidFill>
                   <a:srgbClr val="5A6472"/>
                 </a:solidFill>
                 <a:latin typeface="Calibri" pitchFamily="34" charset="0"/>
+                <a:ea typeface="Amiri" pitchFamily="2" charset="-78"/>
                 <a:cs typeface="Amiri" pitchFamily="2" charset="-78"/>
               </a:rPr>
               <a:t>  pl. نِقَاطُ قُوَّةٍ</a:t>
@@ -45432,6 +45595,7 @@
                   <a:srgbClr val="1B3B6F"/>
                 </a:solidFill>
                 <a:latin typeface="Amiri" pitchFamily="2" charset="-78"/>
+                <a:ea typeface="Amiri" pitchFamily="2" charset="-78"/>
                 <a:cs typeface="Amiri" pitchFamily="2" charset="-78"/>
               </a:rPr>
               <a:t>مَجَالُ تَحْسِينٍ</a:t>
@@ -45478,11 +45642,12 @@
               <a:buNone/>
             </a:pPr>
             <a:r>
-              <a:rPr lang="en-US" sz="1000" i="1" dirty="0">
+              <a:rPr lang="ar-SA" sz="1000" i="1" dirty="0">
                 <a:solidFill>
                   <a:srgbClr val="5A6472"/>
                 </a:solidFill>
                 <a:latin typeface="Calibri" pitchFamily="34" charset="0"/>
+                <a:ea typeface="Amiri" pitchFamily="2" charset="-78"/>
                 <a:cs typeface="Amiri" pitchFamily="2" charset="-78"/>
               </a:rPr>
               <a:t>  pl. مَجَالَاتُ</a:t>
@@ -45600,6 +45765,7 @@
                   <a:srgbClr val="1B3B6F"/>
                 </a:solidFill>
                 <a:latin typeface="Amiri" pitchFamily="2" charset="-78"/>
+                <a:ea typeface="Amiri" pitchFamily="2" charset="-78"/>
                 <a:cs typeface="Amiri" pitchFamily="2" charset="-78"/>
               </a:rPr>
               <a:t>نُقْطَةُ قُوَّتِي ______ ، وَمَجَالُ تَحْسِينِي ______ .</a:t>
@@ -46269,6 +46435,7 @@
                   <a:srgbClr val="FFFFFF"/>
                 </a:solidFill>
                 <a:latin typeface="Amiri" pitchFamily="2" charset="-78"/>
+                <a:ea typeface="Amiri" pitchFamily="2" charset="-78"/>
                 <a:cs typeface="Amiri" pitchFamily="2" charset="-78"/>
               </a:rPr>
               <a:t>أَحْسَنْتُمْ! إِلَى اللِّقَاءِ</a:t>
@@ -46421,6 +46588,7 @@
                   <a:srgbClr val="D4AF37"/>
                 </a:solidFill>
                 <a:latin typeface="Amiri" pitchFamily="2" charset="-78"/>
+                <a:ea typeface="Amiri" pitchFamily="2" charset="-78"/>
                 <a:cs typeface="Amiri" pitchFamily="2" charset="-78"/>
               </a:rPr>
               <a:t>إِطْلَاقُ الجِسْرِ</a:t>
@@ -46554,6 +46722,7 @@
                   <a:srgbClr val="D4AF37"/>
                 </a:solidFill>
                 <a:latin typeface="Amiri" pitchFamily="2" charset="-78"/>
+                <a:ea typeface="Amiri" pitchFamily="2" charset="-78"/>
                 <a:cs typeface="Amiri" pitchFamily="2" charset="-78"/>
               </a:rPr>
               <a:t>م</a:t>
@@ -46874,6 +47043,7 @@
                   <a:srgbClr val="8A6D1E"/>
                 </a:solidFill>
                 <a:latin typeface="Amiri" pitchFamily="2" charset="-78"/>
+                <a:ea typeface="Amiri" pitchFamily="2" charset="-78"/>
                 <a:cs typeface="Amiri" pitchFamily="2" charset="-78"/>
               </a:rPr>
               <a:t>خَرِيطَةُ الدَّرْسِ</a:t>
@@ -47188,6 +47358,7 @@
                   <a:srgbClr val="0E7C86"/>
                 </a:solidFill>
                 <a:latin typeface="Amiri" pitchFamily="2" charset="-78"/>
+                <a:ea typeface="Amiri" pitchFamily="2" charset="-78"/>
                 <a:cs typeface="Amiri" pitchFamily="2" charset="-78"/>
               </a:rPr>
               <a:t>تَهْيِئَةٌ</a:t>
@@ -47464,6 +47635,7 @@
                   <a:srgbClr val="1B3B6F"/>
                 </a:solidFill>
                 <a:latin typeface="Amiri" pitchFamily="2" charset="-78"/>
+                <a:ea typeface="Amiri" pitchFamily="2" charset="-78"/>
                 <a:cs typeface="Amiri" pitchFamily="2" charset="-78"/>
               </a:rPr>
               <a:t>خُطَّةُ التَّقْيِيمِ</a:t>
@@ -47740,6 +47912,7 @@
                   <a:srgbClr val="6B4C9A"/>
                 </a:solidFill>
                 <a:latin typeface="Amiri" pitchFamily="2" charset="-78"/>
+                <a:ea typeface="Amiri" pitchFamily="2" charset="-78"/>
                 <a:cs typeface="Amiri" pitchFamily="2" charset="-78"/>
               </a:rPr>
               <a:t>الاسْتِمَاعُ</a:t>
@@ -48016,6 +48189,7 @@
                   <a:srgbClr val="2F6FB0"/>
                 </a:solidFill>
                 <a:latin typeface="Amiri" pitchFamily="2" charset="-78"/>
+                <a:ea typeface="Amiri" pitchFamily="2" charset="-78"/>
                 <a:cs typeface="Amiri" pitchFamily="2" charset="-78"/>
               </a:rPr>
               <a:t>القِرَاءَةُ</a:t>
@@ -48292,6 +48466,7 @@
                   <a:srgbClr val="1E6B52"/>
                 </a:solidFill>
                 <a:latin typeface="Amiri" pitchFamily="2" charset="-78"/>
+                <a:ea typeface="Amiri" pitchFamily="2" charset="-78"/>
                 <a:cs typeface="Amiri" pitchFamily="2" charset="-78"/>
               </a:rPr>
               <a:t>الكِتَابَةُ وَالتَّحَدُّثُ</a:t>
@@ -48568,6 +48743,7 @@
                   <a:srgbClr val="8A6D1E"/>
                 </a:solidFill>
                 <a:latin typeface="Amiri" pitchFamily="2" charset="-78"/>
+                <a:ea typeface="Amiri" pitchFamily="2" charset="-78"/>
                 <a:cs typeface="Amiri" pitchFamily="2" charset="-78"/>
               </a:rPr>
               <a:t>الهَدَفُ</a:t>
@@ -48844,6 +49020,7 @@
                   <a:srgbClr val="C45A3C"/>
                 </a:solidFill>
                 <a:latin typeface="Amiri" pitchFamily="2" charset="-78"/>
+                <a:ea typeface="Amiri" pitchFamily="2" charset="-78"/>
                 <a:cs typeface="Amiri" pitchFamily="2" charset="-78"/>
               </a:rPr>
               <a:t>اسْتَعِدَّ</a:t>
@@ -49087,6 +49264,7 @@
                   <a:srgbClr val="D4AF37"/>
                 </a:solidFill>
                 <a:latin typeface="Amiri" pitchFamily="2" charset="-78"/>
+                <a:ea typeface="Amiri" pitchFamily="2" charset="-78"/>
                 <a:cs typeface="Amiri" pitchFamily="2" charset="-78"/>
               </a:rPr>
               <a:t>م</a:t>
@@ -49407,6 +49585,7 @@
                   <a:srgbClr val="8A6D1E"/>
                 </a:solidFill>
                 <a:latin typeface="Amiri" pitchFamily="2" charset="-78"/>
+                <a:ea typeface="Amiri" pitchFamily="2" charset="-78"/>
                 <a:cs typeface="Amiri" pitchFamily="2" charset="-78"/>
               </a:rPr>
               <a:t>اِبْدَأِ الآنَ</a:t>
@@ -49593,6 +49772,7 @@
                   <a:srgbClr val="1B3B6F"/>
                 </a:solidFill>
                 <a:latin typeface="Amiri" pitchFamily="2" charset="-78"/>
+                <a:ea typeface="Amiri" pitchFamily="2" charset="-78"/>
                 <a:cs typeface="Amiri" pitchFamily="2" charset="-78"/>
               </a:rPr>
               <a:t>المَوْقِفُ المُضَادُّ</a:t>
@@ -50145,6 +50325,7 @@
                   <a:srgbClr val="1F2A37"/>
                 </a:solidFill>
                 <a:latin typeface="Amiri" pitchFamily="2" charset="-78"/>
+                <a:ea typeface="Amiri" pitchFamily="2" charset="-78"/>
                 <a:cs typeface="Amiri" pitchFamily="2" charset="-78"/>
               </a:rPr>
               <a:t>صَحِيحٌ أَنَّ التَّعْلِيمَ يَتَطَلَّبُ مَوَارِدَ.</a:t>
@@ -50246,6 +50427,7 @@
                   <a:srgbClr val="1F2A37"/>
                 </a:solidFill>
                 <a:latin typeface="Amiri" pitchFamily="2" charset="-78"/>
+                <a:ea typeface="Amiri" pitchFamily="2" charset="-78"/>
                 <a:cs typeface="Amiri" pitchFamily="2" charset="-78"/>
               </a:rPr>
               <a:t>صَحِيحٌ أَنَّ التَّعْلِيمَ يَتَطَلَّبَ مَوَارِدَ.</a:t>
@@ -50347,6 +50529,7 @@
                   <a:srgbClr val="1F2A37"/>
                 </a:solidFill>
                 <a:latin typeface="Amiri" pitchFamily="2" charset="-78"/>
+                <a:ea typeface="Amiri" pitchFamily="2" charset="-78"/>
                 <a:cs typeface="Amiri" pitchFamily="2" charset="-78"/>
               </a:rPr>
               <a:t>صَحِيحٌ أَنْ التَّعْلِيمَ يَتَطَلَّبَ مَوَارِدَ.</a:t>
@@ -50583,6 +50766,7 @@
                   <a:srgbClr val="1F2A37"/>
                 </a:solidFill>
                 <a:latin typeface="Amiri" pitchFamily="2" charset="-78"/>
+                <a:ea typeface="Amiri" pitchFamily="2" charset="-78"/>
                 <a:cs typeface="Amiri" pitchFamily="2" charset="-78"/>
               </a:rPr>
               <a:t>يُطَالِبُ النَّاشِطُونَ عَلَى أَنْ تُوَقِّعَ الدُّوَلُ.</a:t>
@@ -50684,6 +50868,7 @@
                   <a:srgbClr val="1F2A37"/>
                 </a:solidFill>
                 <a:latin typeface="Amiri" pitchFamily="2" charset="-78"/>
+                <a:ea typeface="Amiri" pitchFamily="2" charset="-78"/>
                 <a:cs typeface="Amiri" pitchFamily="2" charset="-78"/>
               </a:rPr>
               <a:t>يُطَالِبُ النَّاشِطُونَ بِأَنَّ تُوَقِّعَ الدُّوَلُ.</a:t>
@@ -50785,6 +50970,7 @@
                   <a:srgbClr val="1F2A37"/>
                 </a:solidFill>
                 <a:latin typeface="Amiri" pitchFamily="2" charset="-78"/>
+                <a:ea typeface="Amiri" pitchFamily="2" charset="-78"/>
                 <a:cs typeface="Amiri" pitchFamily="2" charset="-78"/>
               </a:rPr>
               <a:t>يُطَالِبُ النَّاشِطُونَ بِأَنْ تُوَقِّعَ الدُّوَلُ.</a:t>
@@ -51021,6 +51207,7 @@
                   <a:srgbClr val="1F2A37"/>
                 </a:solidFill>
                 <a:latin typeface="Amiri" pitchFamily="2" charset="-78"/>
+                <a:ea typeface="Amiri" pitchFamily="2" charset="-78"/>
                 <a:cs typeface="Amiri" pitchFamily="2" charset="-78"/>
               </a:rPr>
               <a:t>يَرْفُضُ النَّاشِطُونَ أَنْ تَسْتَمِرُّ الازْدِوَاجِيَّةُ.</a:t>
@@ -51122,6 +51309,7 @@
                   <a:srgbClr val="1F2A37"/>
                 </a:solidFill>
                 <a:latin typeface="Amiri" pitchFamily="2" charset="-78"/>
+                <a:ea typeface="Amiri" pitchFamily="2" charset="-78"/>
                 <a:cs typeface="Amiri" pitchFamily="2" charset="-78"/>
               </a:rPr>
               <a:t>يَرْفُضُ النَّاشِطُونَ أَنَّ تَسْتَمِرَّ الازْدِوَاجِيَّةُ.</a:t>
@@ -51223,6 +51411,7 @@
                   <a:srgbClr val="1F2A37"/>
                 </a:solidFill>
                 <a:latin typeface="Amiri" pitchFamily="2" charset="-78"/>
+                <a:ea typeface="Amiri" pitchFamily="2" charset="-78"/>
                 <a:cs typeface="Amiri" pitchFamily="2" charset="-78"/>
               </a:rPr>
               <a:t>يَرْفُضُ النَّاشِطُونَ أَنْ تَسْتَمِرَّ الازْدِوَاجِيَّةُ.</a:t>
@@ -51459,6 +51648,7 @@
                   <a:srgbClr val="1F2A37"/>
                 </a:solidFill>
                 <a:latin typeface="Amiri" pitchFamily="2" charset="-78"/>
+                <a:ea typeface="Amiri" pitchFamily="2" charset="-78"/>
                 <a:cs typeface="Amiri" pitchFamily="2" charset="-78"/>
               </a:rPr>
               <a:t>لَوْ عُولِجَ التَّفَاوُتُ مُبَكِّرًا، لَتَحَسَّنَ الوَضْعُ.</a:t>
@@ -51560,6 +51750,7 @@
                   <a:srgbClr val="1F2A37"/>
                 </a:solidFill>
                 <a:latin typeface="Amiri" pitchFamily="2" charset="-78"/>
+                <a:ea typeface="Amiri" pitchFamily="2" charset="-78"/>
                 <a:cs typeface="Amiri" pitchFamily="2" charset="-78"/>
               </a:rPr>
               <a:t>لَوْ عُولِجَ التَّفَاوُتُ مُبَكِّرًا، تَحَسَّنَ الوَضْعُ.</a:t>
@@ -51661,6 +51852,7 @@
                   <a:srgbClr val="1F2A37"/>
                 </a:solidFill>
                 <a:latin typeface="Amiri" pitchFamily="2" charset="-78"/>
+                <a:ea typeface="Amiri" pitchFamily="2" charset="-78"/>
                 <a:cs typeface="Amiri" pitchFamily="2" charset="-78"/>
               </a:rPr>
               <a:t>لَوْ عُولِجَ التَّفَاوُتُ مُبَكِّرًا، سَيَتَحَسَّنُ الوَضْعُ.</a:t>
@@ -51996,6 +52188,7 @@
                   <a:srgbClr val="D4AF37"/>
                 </a:solidFill>
                 <a:latin typeface="Amiri" pitchFamily="2" charset="-78"/>
+                <a:ea typeface="Amiri" pitchFamily="2" charset="-78"/>
                 <a:cs typeface="Amiri" pitchFamily="2" charset="-78"/>
               </a:rPr>
               <a:t>م</a:t>
@@ -52316,6 +52509,7 @@
                   <a:srgbClr val="8A6D1E"/>
                 </a:solidFill>
                 <a:latin typeface="Amiri" pitchFamily="2" charset="-78"/>
+                <a:ea typeface="Amiri" pitchFamily="2" charset="-78"/>
                 <a:cs typeface="Amiri" pitchFamily="2" charset="-78"/>
               </a:rPr>
               <a:t>الإِجَابَاتُ وَالتَّعْلِيلُ</a:t>
@@ -52502,6 +52696,7 @@
                   <a:srgbClr val="1B3B6F"/>
                 </a:solidFill>
                 <a:latin typeface="Amiri" pitchFamily="2" charset="-78"/>
+                <a:ea typeface="Amiri" pitchFamily="2" charset="-78"/>
                 <a:cs typeface="Amiri" pitchFamily="2" charset="-78"/>
               </a:rPr>
               <a:t>المَوْقِفُ المُضَادُّ</a:t>
@@ -53146,6 +53341,7 @@
                   <a:srgbClr val="1F2A37"/>
                 </a:solidFill>
                 <a:latin typeface="Amiri" pitchFamily="2" charset="-78"/>
+                <a:ea typeface="Amiri" pitchFamily="2" charset="-78"/>
                 <a:cs typeface="Amiri" pitchFamily="2" charset="-78"/>
               </a:rPr>
               <a:t>صَحِيحٌ أَنَّ التَّعْلِيمَ يَتَطَلَّبُ مَوَارِدَ.</a:t>
@@ -53247,6 +53443,7 @@
                   <a:srgbClr val="9AA1AB"/>
                 </a:solidFill>
                 <a:latin typeface="Amiri" pitchFamily="2" charset="-78"/>
+                <a:ea typeface="Amiri" pitchFamily="2" charset="-78"/>
                 <a:cs typeface="Amiri" pitchFamily="2" charset="-78"/>
               </a:rPr>
               <a:t>صَحِيحٌ أَنَّ التَّعْلِيمَ يَتَطَلَّبَ مَوَارِدَ.</a:t>
@@ -53348,6 +53545,7 @@
                   <a:srgbClr val="9AA1AB"/>
                 </a:solidFill>
                 <a:latin typeface="Amiri" pitchFamily="2" charset="-78"/>
+                <a:ea typeface="Amiri" pitchFamily="2" charset="-78"/>
                 <a:cs typeface="Amiri" pitchFamily="2" charset="-78"/>
               </a:rPr>
               <a:t>صَحِيحٌ أَنْ التَّعْلِيمَ يَتَطَلَّبَ مَوَارِدَ.</a:t>
@@ -53622,6 +53820,7 @@
                   <a:srgbClr val="9AA1AB"/>
                 </a:solidFill>
                 <a:latin typeface="Amiri" pitchFamily="2" charset="-78"/>
+                <a:ea typeface="Amiri" pitchFamily="2" charset="-78"/>
                 <a:cs typeface="Amiri" pitchFamily="2" charset="-78"/>
               </a:rPr>
               <a:t>يُطَالِبُ النَّاشِطُونَ عَلَى أَنْ تُوَقِّعَ الدُّوَلُ.</a:t>
@@ -53723,6 +53922,7 @@
                   <a:srgbClr val="9AA1AB"/>
                 </a:solidFill>
                 <a:latin typeface="Amiri" pitchFamily="2" charset="-78"/>
+                <a:ea typeface="Amiri" pitchFamily="2" charset="-78"/>
                 <a:cs typeface="Amiri" pitchFamily="2" charset="-78"/>
               </a:rPr>
               <a:t>يُطَالِبُ النَّاشِطُونَ بِأَنَّ تُوَقِّعَ الدُّوَلُ.</a:t>
@@ -53851,6 +54051,7 @@
                   <a:srgbClr val="1F2A37"/>
                 </a:solidFill>
                 <a:latin typeface="Amiri" pitchFamily="2" charset="-78"/>
+                <a:ea typeface="Amiri" pitchFamily="2" charset="-78"/>
                 <a:cs typeface="Amiri" pitchFamily="2" charset="-78"/>
               </a:rPr>
               <a:t>يُطَالِبُ النَّاشِطُونَ بِأَنْ تُوَقِّعَ الدُّوَلُ.</a:t>
@@ -54125,6 +54326,7 @@
                   <a:srgbClr val="9AA1AB"/>
                 </a:solidFill>
                 <a:latin typeface="Amiri" pitchFamily="2" charset="-78"/>
+                <a:ea typeface="Amiri" pitchFamily="2" charset="-78"/>
                 <a:cs typeface="Amiri" pitchFamily="2" charset="-78"/>
               </a:rPr>
               <a:t>يَرْفُضُ النَّاشِطُونَ أَنْ تَسْتَمِرُّ الازْدِوَاجِيَّةُ.</a:t>
@@ -54226,6 +54428,7 @@
                   <a:srgbClr val="9AA1AB"/>
                 </a:solidFill>
                 <a:latin typeface="Amiri" pitchFamily="2" charset="-78"/>
+                <a:ea typeface="Amiri" pitchFamily="2" charset="-78"/>
                 <a:cs typeface="Amiri" pitchFamily="2" charset="-78"/>
               </a:rPr>
               <a:t>يَرْفُضُ النَّاشِطُونَ أَنَّ تَسْتَمِرَّ الازْدِوَاجِيَّةُ.</a:t>
@@ -54354,6 +54557,7 @@
                   <a:srgbClr val="1F2A37"/>
                 </a:solidFill>
                 <a:latin typeface="Amiri" pitchFamily="2" charset="-78"/>
+                <a:ea typeface="Amiri" pitchFamily="2" charset="-78"/>
                 <a:cs typeface="Amiri" pitchFamily="2" charset="-78"/>
               </a:rPr>
               <a:t>يَرْفُضُ النَّاشِطُونَ أَنْ تَسْتَمِرَّ الازْدِوَاجِيَّةُ.</a:t>
@@ -54655,6 +54859,7 @@
                   <a:srgbClr val="1F2A37"/>
                 </a:solidFill>
                 <a:latin typeface="Amiri" pitchFamily="2" charset="-78"/>
+                <a:ea typeface="Amiri" pitchFamily="2" charset="-78"/>
                 <a:cs typeface="Amiri" pitchFamily="2" charset="-78"/>
               </a:rPr>
               <a:t>لَوْ عُولِجَ التَّفَاوُتُ مُبَكِّرًا، لَتَحَسَّنَ الوَضْعُ.</a:t>
@@ -54756,6 +54961,7 @@
                   <a:srgbClr val="9AA1AB"/>
                 </a:solidFill>
                 <a:latin typeface="Amiri" pitchFamily="2" charset="-78"/>
+                <a:ea typeface="Amiri" pitchFamily="2" charset="-78"/>
                 <a:cs typeface="Amiri" pitchFamily="2" charset="-78"/>
               </a:rPr>
               <a:t>لَوْ عُولِجَ التَّفَاوُتُ مُبَكِّرًا، تَحَسَّنَ الوَضْعُ.</a:t>
@@ -54857,6 +55063,7 @@
                   <a:srgbClr val="9AA1AB"/>
                 </a:solidFill>
                 <a:latin typeface="Amiri" pitchFamily="2" charset="-78"/>
+                <a:ea typeface="Amiri" pitchFamily="2" charset="-78"/>
                 <a:cs typeface="Amiri" pitchFamily="2" charset="-78"/>
               </a:rPr>
               <a:t>لَوْ عُولِجَ التَّفَاوُتُ مُبَكِّرًا، سَيَتَحَسَّنُ الوَضْعُ.</a:t>
@@ -55046,6 +55253,7 @@
                   <a:srgbClr val="1B3B6F"/>
                 </a:solidFill>
                 <a:latin typeface="Amiri" pitchFamily="2" charset="-78"/>
+                <a:ea typeface="Amiri" pitchFamily="2" charset="-78"/>
                 <a:cs typeface="Amiri" pitchFamily="2" charset="-78"/>
               </a:rPr>
               <a:t>صَحِيحٌ أَنَّ … يَتَطَلَّبُ · بِأَنْ تُوَقِّعَ · أَنْ تَسْتَمِرَّ · لَوْ … لَتَحَسَّنَ</a:t>
@@ -55179,6 +55387,7 @@
                   <a:srgbClr val="D4AF37"/>
                 </a:solidFill>
                 <a:latin typeface="Amiri" pitchFamily="2" charset="-78"/>
+                <a:ea typeface="Amiri" pitchFamily="2" charset="-78"/>
                 <a:cs typeface="Amiri" pitchFamily="2" charset="-78"/>
               </a:rPr>
               <a:t>م</a:t>
@@ -55499,6 +55708,7 @@
                   <a:srgbClr val="8A6D1E"/>
                 </a:solidFill>
                 <a:latin typeface="Amiri" pitchFamily="2" charset="-78"/>
+                <a:ea typeface="Amiri" pitchFamily="2" charset="-78"/>
                 <a:cs typeface="Amiri" pitchFamily="2" charset="-78"/>
               </a:rPr>
               <a:t>مُرَاجَعَةُ القَوَاعِدِ</a:t>
@@ -55779,6 +55989,7 @@
                   <a:srgbClr val="1B3B6F"/>
                 </a:solidFill>
                 <a:latin typeface="Amiri" pitchFamily="2" charset="-78"/>
+                <a:ea typeface="Amiri" pitchFamily="2" charset="-78"/>
                 <a:cs typeface="Amiri" pitchFamily="2" charset="-78"/>
               </a:rPr>
               <a:t>صَحِيحٌ أَنَّ التَّعْلِيمَ يَتَطَلَّبُ مَوَارِدَ، غَيْرَ أَنَّ العَائِدَ أَكْبَرُ</a:t>
@@ -55985,6 +56196,7 @@
                   <a:srgbClr val="1B3B6F"/>
                 </a:solidFill>
                 <a:latin typeface="Amiri" pitchFamily="2" charset="-78"/>
+                <a:ea typeface="Amiri" pitchFamily="2" charset="-78"/>
                 <a:cs typeface="Amiri" pitchFamily="2" charset="-78"/>
               </a:rPr>
               <a:t>يُصِرُّ عَلَى أَنْ تَحْصُلَ · يُطَالِبُ بِأَنْ تُوَقِّعَ · يَمْنَعُ أَنْ تُبَاعَ · يَرْفُضُ أَنْ تَسْتَمِرَّ</a:t>
@@ -56191,6 +56403,7 @@
                   <a:srgbClr val="1B3B6F"/>
                 </a:solidFill>
                 <a:latin typeface="Amiri" pitchFamily="2" charset="-78"/>
+                <a:ea typeface="Amiri" pitchFamily="2" charset="-78"/>
                 <a:cs typeface="Amiri" pitchFamily="2" charset="-78"/>
               </a:rPr>
               <a:t>يُطَالِبُ بِأَنْ تُوَقِّعَ · أَكَّدَ أَنَّ الوَقْتَ يَنْفَدُ</a:t>
@@ -56397,6 +56610,7 @@
                   <a:srgbClr val="1B3B6F"/>
                 </a:solidFill>
                 <a:latin typeface="Amiri" pitchFamily="2" charset="-78"/>
+                <a:ea typeface="Amiri" pitchFamily="2" charset="-78"/>
                 <a:cs typeface="Amiri" pitchFamily="2" charset="-78"/>
               </a:rPr>
               <a:t>لَوْ عُولِجَ التَّفَاوُتُ مُبَكِّرًا، لَتَحَسَّنَ الوَضْعُ · يُهَجَّرُ</a:t>
@@ -56538,6 +56752,7 @@
                   <a:srgbClr val="1B3B6F"/>
                 </a:solidFill>
                 <a:latin typeface="Amiri" pitchFamily="2" charset="-78"/>
+                <a:ea typeface="Amiri" pitchFamily="2" charset="-78"/>
                 <a:cs typeface="Amiri" pitchFamily="2" charset="-78"/>
               </a:rPr>
               <a:t>وَبِنَاءً عَلَى مَا سَبَقَ … أَنْ تَتَحَرَّكَ · وَخُلَاصَةُ القَوْلِ</a:t>
@@ -56747,6 +56962,7 @@
                   <a:srgbClr val="D4AF37"/>
                 </a:solidFill>
                 <a:latin typeface="Amiri" pitchFamily="2" charset="-78"/>
+                <a:ea typeface="Amiri" pitchFamily="2" charset="-78"/>
                 <a:cs typeface="Amiri" pitchFamily="2" charset="-78"/>
               </a:rPr>
               <a:t>م</a:t>
@@ -57067,6 +57283,7 @@
                   <a:srgbClr val="8A6D1E"/>
                 </a:solidFill>
                 <a:latin typeface="Amiri" pitchFamily="2" charset="-78"/>
+                <a:ea typeface="Amiri" pitchFamily="2" charset="-78"/>
                 <a:cs typeface="Amiri" pitchFamily="2" charset="-78"/>
               </a:rPr>
               <a:t>خُطَّةُ التَّقْيِيمِ</a:t>
@@ -58201,6 +58418,7 @@
                   <a:srgbClr val="D4AF37"/>
                 </a:solidFill>
                 <a:latin typeface="Amiri" pitchFamily="2" charset="-78"/>
+                <a:ea typeface="Amiri" pitchFamily="2" charset="-78"/>
                 <a:cs typeface="Amiri" pitchFamily="2" charset="-78"/>
               </a:rPr>
               <a:t>م</a:t>
@@ -58521,6 +58739,7 @@
                   <a:srgbClr val="8A6D1E"/>
                 </a:solidFill>
                 <a:latin typeface="Amiri" pitchFamily="2" charset="-78"/>
+                <a:ea typeface="Amiri" pitchFamily="2" charset="-78"/>
                 <a:cs typeface="Amiri" pitchFamily="2" charset="-78"/>
               </a:rPr>
               <a:t>الاسْتِمَاعُ</a:t>
@@ -60444,6 +60663,7 @@
                   <a:srgbClr val="D4AF37"/>
                 </a:solidFill>
                 <a:latin typeface="Amiri" pitchFamily="2" charset="-78"/>
+                <a:ea typeface="Amiri" pitchFamily="2" charset="-78"/>
                 <a:cs typeface="Amiri" pitchFamily="2" charset="-78"/>
               </a:rPr>
               <a:t>م</a:t>
@@ -60764,6 +60984,7 @@
                   <a:srgbClr val="8A6D1E"/>
                 </a:solidFill>
                 <a:latin typeface="Amiri" pitchFamily="2" charset="-78"/>
+                <a:ea typeface="Amiri" pitchFamily="2" charset="-78"/>
                 <a:cs typeface="Amiri" pitchFamily="2" charset="-78"/>
               </a:rPr>
               <a:t>الإِجَابَاتُ</a:t>
@@ -61305,6 +61526,7 @@
                   <a:srgbClr val="8A6D1E"/>
                 </a:solidFill>
                 <a:latin typeface="Amiri" pitchFamily="2" charset="-78"/>
+                <a:ea typeface="Amiri" pitchFamily="2" charset="-78"/>
                 <a:cs typeface="Amiri" pitchFamily="2" charset="-78"/>
               </a:rPr>
               <a:t>أُطْرُوحَتِي أَنَّ التَّفَاوُتَ الاجْتِمَاعِيَّ يُهَدِّدُ الاسْتِقْرَارَ.</a:t>
@@ -61808,6 +62030,7 @@
                   <a:srgbClr val="8A6D1E"/>
                 </a:solidFill>
                 <a:latin typeface="Amiri" pitchFamily="2" charset="-78"/>
+                <a:ea typeface="Amiri" pitchFamily="2" charset="-78"/>
                 <a:cs typeface="Amiri" pitchFamily="2" charset="-78"/>
               </a:rPr>
               <a:t>أَكَّدَتِ الدِّرَاسَاتُ أَنَّ أَكْثَرَ مِنْ مِئَةِ مِلْيُونِ عَرَبِيٍّ يَعِيشُونَ تَحْتَ حَدِّ الفَقْرِ.</a:t>
@@ -62311,6 +62534,7 @@
                   <a:srgbClr val="8A6D1E"/>
                 </a:solidFill>
                 <a:latin typeface="Amiri" pitchFamily="2" charset="-78"/>
+                <a:ea typeface="Amiri" pitchFamily="2" charset="-78"/>
                 <a:cs typeface="Amiri" pitchFamily="2" charset="-78"/>
               </a:rPr>
               <a:t>صَحِيحٌ أَنَّ الإِصْلَاحَاتِ تَحْتَاجُ وَقْتًا طَوِيلًا وَمَوَارِدَ ضَخْمَةً.</a:t>
@@ -62814,6 +63038,7 @@
                   <a:srgbClr val="8A6D1E"/>
                 </a:solidFill>
                 <a:latin typeface="Amiri" pitchFamily="2" charset="-78"/>
+                <a:ea typeface="Amiri" pitchFamily="2" charset="-78"/>
                 <a:cs typeface="Amiri" pitchFamily="2" charset="-78"/>
               </a:rPr>
               <a:t>غَيْرَ أَنَّ الحَاجَةَ الاجْتِمَاعِيَّةَ المُلِحَّةَ لَا تَتَحَمَّلُ الانْتِظَارَ.</a:t>
@@ -62912,13 +63137,9 @@
     <a:fontScheme name="Office">
       <a:majorFont>
         <a:latin typeface="Calibri Light" panose="020F0302020204030204"/>
-        <a:ea typeface=""/>
-        <a:cs typeface=""/>
-        <a:font script="Jpan" typeface="游ゴシック Light"/>
-        <a:font script="Hang" typeface="맑은 고딕"/>
-        <a:font script="Hans" typeface="等线 Light"/>
-        <a:font script="Hant" typeface="新細明體"/>
-        <a:font script="Arab" typeface="Times New Roman"/>
+        <a:ea typeface="Amiri" pitchFamily="2" charset="-78"/>
+        <a:cs typeface="Amiri" pitchFamily="2" charset="-78"/>
+        <a:font script="Arab" typeface="Amiri"/>
         <a:font script="Hebr" typeface="Times New Roman"/>
         <a:font script="Thai" typeface="Angsana New"/>
         <a:font script="Ethi" typeface="Nyala"/>
@@ -62964,13 +63185,9 @@
       </a:majorFont>
       <a:minorFont>
         <a:latin typeface="Calibri" panose="020F0502020204030204"/>
-        <a:ea typeface=""/>
-        <a:cs typeface=""/>
-        <a:font script="Jpan" typeface="游ゴシック"/>
-        <a:font script="Hang" typeface="맑은 고딕"/>
-        <a:font script="Hans" typeface="等线"/>
-        <a:font script="Hant" typeface="新細明體"/>
-        <a:font script="Arab" typeface="Arial"/>
+        <a:ea typeface="Amiri" pitchFamily="2" charset="-78"/>
+        <a:cs typeface="Amiri" pitchFamily="2" charset="-78"/>
+        <a:font script="Arab" typeface="Amiri"/>
         <a:font script="Hebr" typeface="Arial"/>
         <a:font script="Thai" typeface="Cordia New"/>
         <a:font script="Ethi" typeface="Nyala"/>
